--- a/3D地圖資料庫輔助GNSSRTK及其在.pptx
+++ b/3D地圖資料庫輔助GNSSRTK及其在.pptx
@@ -5,10 +5,10 @@
     <p:sldMasterId id="2147483648" r:id="rId4"/>
   </p:sldMasterIdLst>
   <p:notesMasterIdLst>
-    <p:notesMasterId r:id="rId18"/>
+    <p:notesMasterId r:id="rId20"/>
   </p:notesMasterIdLst>
   <p:handoutMasterIdLst>
-    <p:handoutMasterId r:id="rId19"/>
+    <p:handoutMasterId r:id="rId21"/>
   </p:handoutMasterIdLst>
   <p:sldIdLst>
     <p:sldId id="256" r:id="rId5"/>
@@ -20,10 +20,12 @@
     <p:sldId id="278" r:id="rId11"/>
     <p:sldId id="279" r:id="rId12"/>
     <p:sldId id="280" r:id="rId13"/>
-    <p:sldId id="281" r:id="rId14"/>
-    <p:sldId id="282" r:id="rId15"/>
-    <p:sldId id="273" r:id="rId16"/>
-    <p:sldId id="283" r:id="rId17"/>
+    <p:sldId id="286" r:id="rId14"/>
+    <p:sldId id="281" r:id="rId15"/>
+    <p:sldId id="282" r:id="rId16"/>
+    <p:sldId id="273" r:id="rId17"/>
+    <p:sldId id="284" r:id="rId18"/>
+    <p:sldId id="285" r:id="rId19"/>
   </p:sldIdLst>
   <p:sldSz cx="12192000" cy="6858000"/>
   <p:notesSz cx="6858000" cy="9144000"/>
@@ -247,7 +249,7 @@
                 <a:latin typeface="Microsoft JhengHei UI" panose="020B0604030504040204" pitchFamily="34" charset="-120"/>
                 <a:ea typeface="Microsoft JhengHei UI" panose="020B0604030504040204" pitchFamily="34" charset="-120"/>
               </a:rPr>
-              <a:t>2026/3/13</a:t>
+              <a:t>2026/3/15</a:t>
             </a:fld>
             <a:endParaRPr lang="zh-TW" altLang="en-US">
               <a:latin typeface="Microsoft JhengHei UI" panose="020B0604030504040204" pitchFamily="34" charset="-120"/>
@@ -445,7 +447,7 @@
           <a:p>
             <a:fld id="{6F2E267B-0C99-4BE6-95D3-5B4EB5375E46}" type="datetime1">
               <a:rPr lang="zh-TW" altLang="en-US" noProof="0" smtClean="0"/>
-              <a:t>2026/3/13</a:t>
+              <a:t>2026/3/15</a:t>
             </a:fld>
             <a:endParaRPr lang="zh-TW" altLang="en-US" noProof="0"/>
           </a:p>
@@ -824,6 +826,124 @@
         <p:cNvPr id="1" name="">
           <a:extLst>
             <a:ext uri="{FF2B5EF4-FFF2-40B4-BE49-F238E27FC236}">
+              <a16:creationId xmlns:a16="http://schemas.microsoft.com/office/drawing/2014/main" id="{0BEB88E4-FAC1-11E4-C6BD-E2E3D9261F95}"/>
+            </a:ext>
+          </a:extLst>
+        </p:cNvPr>
+        <p:cNvGrpSpPr/>
+        <p:nvPr/>
+      </p:nvGrpSpPr>
+      <p:grpSpPr>
+        <a:xfrm>
+          <a:off x="0" y="0"/>
+          <a:ext cx="0" cy="0"/>
+          <a:chOff x="0" y="0"/>
+          <a:chExt cx="0" cy="0"/>
+        </a:xfrm>
+      </p:grpSpPr>
+      <p:sp>
+        <p:nvSpPr>
+          <p:cNvPr id="2" name="投影片影像版面配置區 1">
+            <a:extLst>
+              <a:ext uri="{FF2B5EF4-FFF2-40B4-BE49-F238E27FC236}">
+                <a16:creationId xmlns:a16="http://schemas.microsoft.com/office/drawing/2014/main" id="{645B2717-C357-A48A-E464-04714593D477}"/>
+              </a:ext>
+            </a:extLst>
+          </p:cNvPr>
+          <p:cNvSpPr>
+            <a:spLocks noGrp="1" noRot="1" noChangeAspect="1"/>
+          </p:cNvSpPr>
+          <p:nvPr>
+            <p:ph type="sldImg"/>
+          </p:nvPr>
+        </p:nvSpPr>
+        <p:spPr/>
+      </p:sp>
+      <p:sp>
+        <p:nvSpPr>
+          <p:cNvPr id="3" name="備忘稿版面配置區 2">
+            <a:extLst>
+              <a:ext uri="{FF2B5EF4-FFF2-40B4-BE49-F238E27FC236}">
+                <a16:creationId xmlns:a16="http://schemas.microsoft.com/office/drawing/2014/main" id="{C0F82597-4369-5471-9A8F-15E69DE96006}"/>
+              </a:ext>
+            </a:extLst>
+          </p:cNvPr>
+          <p:cNvSpPr>
+            <a:spLocks noGrp="1"/>
+          </p:cNvSpPr>
+          <p:nvPr>
+            <p:ph type="body" idx="1"/>
+          </p:nvPr>
+        </p:nvSpPr>
+        <p:spPr/>
+        <p:txBody>
+          <a:bodyPr/>
+          <a:lstStyle/>
+          <a:p>
+            <a:endParaRPr lang="zh-TW" altLang="en-US">
+              <a:latin typeface="Microsoft JhengHei UI" panose="020B0604030504040204" pitchFamily="34" charset="-120"/>
+              <a:ea typeface="Microsoft JhengHei UI" panose="020B0604030504040204" pitchFamily="34" charset="-120"/>
+            </a:endParaRPr>
+          </a:p>
+        </p:txBody>
+      </p:sp>
+      <p:sp>
+        <p:nvSpPr>
+          <p:cNvPr id="4" name="投影片編號版面配置區 3">
+            <a:extLst>
+              <a:ext uri="{FF2B5EF4-FFF2-40B4-BE49-F238E27FC236}">
+                <a16:creationId xmlns:a16="http://schemas.microsoft.com/office/drawing/2014/main" id="{F8ED9AB6-88CF-6E91-7D74-93D0948592DF}"/>
+              </a:ext>
+            </a:extLst>
+          </p:cNvPr>
+          <p:cNvSpPr>
+            <a:spLocks noGrp="1"/>
+          </p:cNvSpPr>
+          <p:nvPr>
+            <p:ph type="sldNum" sz="quarter" idx="5"/>
+          </p:nvPr>
+        </p:nvSpPr>
+        <p:spPr/>
+        <p:txBody>
+          <a:bodyPr/>
+          <a:lstStyle/>
+          <a:p>
+            <a:pPr rtl="0"/>
+            <a:fld id="{F97DC217-DF71-1A49-B3EA-559F1F43B0FF}" type="slidenum">
+              <a:rPr lang="en-US" altLang="zh-TW" smtClean="0">
+                <a:latin typeface="Microsoft JhengHei UI" panose="020B0604030504040204" pitchFamily="34" charset="-120"/>
+                <a:ea typeface="Microsoft JhengHei UI" panose="020B0604030504040204" pitchFamily="34" charset="-120"/>
+              </a:rPr>
+              <a:t>10</a:t>
+            </a:fld>
+            <a:endParaRPr lang="zh-TW" altLang="en-US">
+              <a:latin typeface="Microsoft JhengHei UI" panose="020B0604030504040204" pitchFamily="34" charset="-120"/>
+              <a:ea typeface="Microsoft JhengHei UI" panose="020B0604030504040204" pitchFamily="34" charset="-120"/>
+            </a:endParaRPr>
+          </a:p>
+        </p:txBody>
+      </p:sp>
+    </p:spTree>
+    <p:extLst>
+      <p:ext uri="{BB962C8B-B14F-4D97-AF65-F5344CB8AC3E}">
+        <p14:creationId xmlns:p14="http://schemas.microsoft.com/office/powerpoint/2010/main" val="904728606"/>
+      </p:ext>
+    </p:extLst>
+  </p:cSld>
+  <p:clrMapOvr>
+    <a:masterClrMapping/>
+  </p:clrMapOvr>
+</p:notes>
+</file>
+
+<file path=ppt/notesSlides/notesSlide11.xml><?xml version="1.0" encoding="utf-8"?>
+<p:notes xmlns:a="http://schemas.openxmlformats.org/drawingml/2006/main" xmlns:r="http://schemas.openxmlformats.org/officeDocument/2006/relationships" xmlns:p="http://schemas.openxmlformats.org/presentationml/2006/main">
+  <p:cSld>
+    <p:spTree>
+      <p:nvGrpSpPr>
+        <p:cNvPr id="1" name="">
+          <a:extLst>
+            <a:ext uri="{FF2B5EF4-FFF2-40B4-BE49-F238E27FC236}">
               <a16:creationId xmlns:a16="http://schemas.microsoft.com/office/drawing/2014/main" id="{FE6A4B25-8E16-8043-2E2E-A8C5E88C83D7}"/>
             </a:ext>
           </a:extLst>
@@ -912,7 +1032,7 @@
                 <a:latin typeface="Microsoft JhengHei UI" panose="020B0604030504040204" pitchFamily="34" charset="-120"/>
                 <a:ea typeface="Microsoft JhengHei UI" panose="020B0604030504040204" pitchFamily="34" charset="-120"/>
               </a:rPr>
-              <a:t>10</a:t>
+              <a:t>11</a:t>
             </a:fld>
             <a:endParaRPr lang="zh-TW" altLang="en-US">
               <a:latin typeface="Microsoft JhengHei UI" panose="020B0604030504040204" pitchFamily="34" charset="-120"/>
@@ -934,7 +1054,7 @@
 </p:notes>
 </file>
 
-<file path=ppt/notesSlides/notesSlide11.xml><?xml version="1.0" encoding="utf-8"?>
+<file path=ppt/notesSlides/notesSlide12.xml><?xml version="1.0" encoding="utf-8"?>
 <p:notes xmlns:a="http://schemas.openxmlformats.org/drawingml/2006/main" xmlns:r="http://schemas.openxmlformats.org/officeDocument/2006/relationships" xmlns:p="http://schemas.openxmlformats.org/presentationml/2006/main">
   <p:cSld>
     <p:spTree>
@@ -1030,7 +1150,7 @@
                 <a:latin typeface="Microsoft JhengHei UI" panose="020B0604030504040204" pitchFamily="34" charset="-120"/>
                 <a:ea typeface="Microsoft JhengHei UI" panose="020B0604030504040204" pitchFamily="34" charset="-120"/>
               </a:rPr>
-              <a:t>11</a:t>
+              <a:t>12</a:t>
             </a:fld>
             <a:endParaRPr lang="zh-TW" altLang="en-US">
               <a:latin typeface="Microsoft JhengHei UI" panose="020B0604030504040204" pitchFamily="34" charset="-120"/>
@@ -1052,7 +1172,7 @@
 </p:notes>
 </file>
 
-<file path=ppt/notesSlides/notesSlide12.xml><?xml version="1.0" encoding="utf-8"?>
+<file path=ppt/notesSlides/notesSlide13.xml><?xml version="1.0" encoding="utf-8"?>
 <p:notes xmlns:a="http://schemas.openxmlformats.org/drawingml/2006/main" xmlns:r="http://schemas.openxmlformats.org/officeDocument/2006/relationships" xmlns:p="http://schemas.openxmlformats.org/presentationml/2006/main">
   <p:cSld>
     <p:spTree>
@@ -1124,7 +1244,7 @@
                 <a:latin typeface="Microsoft JhengHei UI" panose="020B0604030504040204" pitchFamily="34" charset="-120"/>
                 <a:ea typeface="Microsoft JhengHei UI" panose="020B0604030504040204" pitchFamily="34" charset="-120"/>
               </a:rPr>
-              <a:t>12</a:t>
+              <a:t>13</a:t>
             </a:fld>
             <a:endParaRPr lang="zh-TW" altLang="en-US">
               <a:latin typeface="Microsoft JhengHei UI" panose="020B0604030504040204" pitchFamily="34" charset="-120"/>
@@ -1146,7 +1266,7 @@
 </p:notes>
 </file>
 
-<file path=ppt/notesSlides/notesSlide13.xml><?xml version="1.0" encoding="utf-8"?>
+<file path=ppt/notesSlides/notesSlide14.xml><?xml version="1.0" encoding="utf-8"?>
 <p:notes xmlns:a="http://schemas.openxmlformats.org/drawingml/2006/main" xmlns:r="http://schemas.openxmlformats.org/officeDocument/2006/relationships" xmlns:p="http://schemas.openxmlformats.org/presentationml/2006/main">
   <p:cSld>
     <p:spTree>
@@ -1154,7 +1274,7 @@
         <p:cNvPr id="1" name="">
           <a:extLst>
             <a:ext uri="{FF2B5EF4-FFF2-40B4-BE49-F238E27FC236}">
-              <a16:creationId xmlns:a16="http://schemas.microsoft.com/office/drawing/2014/main" id="{7C9A3B5B-8C3D-140C-DA20-7F5C0BE64538}"/>
+              <a16:creationId xmlns:a16="http://schemas.microsoft.com/office/drawing/2014/main" id="{F8CFB2BF-D90E-F41C-2D68-CC8C1B36541C}"/>
             </a:ext>
           </a:extLst>
         </p:cNvPr>
@@ -1174,7 +1294,7 @@
           <p:cNvPr id="2" name="投影片影像版面配置區 1">
             <a:extLst>
               <a:ext uri="{FF2B5EF4-FFF2-40B4-BE49-F238E27FC236}">
-                <a16:creationId xmlns:a16="http://schemas.microsoft.com/office/drawing/2014/main" id="{802B8D21-6BAD-B951-92A9-03F75FAFD754}"/>
+                <a16:creationId xmlns:a16="http://schemas.microsoft.com/office/drawing/2014/main" id="{BC670D5F-B008-DB32-9684-C432A5BEABD2}"/>
               </a:ext>
             </a:extLst>
           </p:cNvPr>
@@ -1192,7 +1312,7 @@
           <p:cNvPr id="3" name="備忘稿版面配置區 2">
             <a:extLst>
               <a:ext uri="{FF2B5EF4-FFF2-40B4-BE49-F238E27FC236}">
-                <a16:creationId xmlns:a16="http://schemas.microsoft.com/office/drawing/2014/main" id="{1021DAE4-3001-3930-D978-8898FD33045B}"/>
+                <a16:creationId xmlns:a16="http://schemas.microsoft.com/office/drawing/2014/main" id="{90ABDCB2-59F5-4313-A672-8FFE566DF7DA}"/>
               </a:ext>
             </a:extLst>
           </p:cNvPr>
@@ -1220,7 +1340,7 @@
           <p:cNvPr id="4" name="投影片編號版面配置區 3">
             <a:extLst>
               <a:ext uri="{FF2B5EF4-FFF2-40B4-BE49-F238E27FC236}">
-                <a16:creationId xmlns:a16="http://schemas.microsoft.com/office/drawing/2014/main" id="{0A27A069-AD27-4DF6-7897-81C6F6C76C55}"/>
+                <a16:creationId xmlns:a16="http://schemas.microsoft.com/office/drawing/2014/main" id="{AC14EB0D-53EC-414A-6289-26C9BB82013C}"/>
               </a:ext>
             </a:extLst>
           </p:cNvPr>
@@ -1242,7 +1362,7 @@
                 <a:latin typeface="Microsoft JhengHei UI" panose="020B0604030504040204" pitchFamily="34" charset="-120"/>
                 <a:ea typeface="Microsoft JhengHei UI" panose="020B0604030504040204" pitchFamily="34" charset="-120"/>
               </a:rPr>
-              <a:t>13</a:t>
+              <a:t>14</a:t>
             </a:fld>
             <a:endParaRPr lang="zh-TW" altLang="en-US">
               <a:latin typeface="Microsoft JhengHei UI" panose="020B0604030504040204" pitchFamily="34" charset="-120"/>
@@ -1254,7 +1374,125 @@
     </p:spTree>
     <p:extLst>
       <p:ext uri="{BB962C8B-B14F-4D97-AF65-F5344CB8AC3E}">
-        <p14:creationId xmlns:p14="http://schemas.microsoft.com/office/powerpoint/2010/main" val="2908623824"/>
+        <p14:creationId xmlns:p14="http://schemas.microsoft.com/office/powerpoint/2010/main" val="9405739"/>
+      </p:ext>
+    </p:extLst>
+  </p:cSld>
+  <p:clrMapOvr>
+    <a:masterClrMapping/>
+  </p:clrMapOvr>
+</p:notes>
+</file>
+
+<file path=ppt/notesSlides/notesSlide15.xml><?xml version="1.0" encoding="utf-8"?>
+<p:notes xmlns:a="http://schemas.openxmlformats.org/drawingml/2006/main" xmlns:r="http://schemas.openxmlformats.org/officeDocument/2006/relationships" xmlns:p="http://schemas.openxmlformats.org/presentationml/2006/main">
+  <p:cSld>
+    <p:spTree>
+      <p:nvGrpSpPr>
+        <p:cNvPr id="1" name="">
+          <a:extLst>
+            <a:ext uri="{FF2B5EF4-FFF2-40B4-BE49-F238E27FC236}">
+              <a16:creationId xmlns:a16="http://schemas.microsoft.com/office/drawing/2014/main" id="{EF714B13-C253-FECA-7437-FC2FF25CD507}"/>
+            </a:ext>
+          </a:extLst>
+        </p:cNvPr>
+        <p:cNvGrpSpPr/>
+        <p:nvPr/>
+      </p:nvGrpSpPr>
+      <p:grpSpPr>
+        <a:xfrm>
+          <a:off x="0" y="0"/>
+          <a:ext cx="0" cy="0"/>
+          <a:chOff x="0" y="0"/>
+          <a:chExt cx="0" cy="0"/>
+        </a:xfrm>
+      </p:grpSpPr>
+      <p:sp>
+        <p:nvSpPr>
+          <p:cNvPr id="2" name="投影片影像版面配置區 1">
+            <a:extLst>
+              <a:ext uri="{FF2B5EF4-FFF2-40B4-BE49-F238E27FC236}">
+                <a16:creationId xmlns:a16="http://schemas.microsoft.com/office/drawing/2014/main" id="{3BC24CE6-D27B-8825-396C-414D6982A769}"/>
+              </a:ext>
+            </a:extLst>
+          </p:cNvPr>
+          <p:cNvSpPr>
+            <a:spLocks noGrp="1" noRot="1" noChangeAspect="1"/>
+          </p:cNvSpPr>
+          <p:nvPr>
+            <p:ph type="sldImg"/>
+          </p:nvPr>
+        </p:nvSpPr>
+        <p:spPr/>
+      </p:sp>
+      <p:sp>
+        <p:nvSpPr>
+          <p:cNvPr id="3" name="備忘稿版面配置區 2">
+            <a:extLst>
+              <a:ext uri="{FF2B5EF4-FFF2-40B4-BE49-F238E27FC236}">
+                <a16:creationId xmlns:a16="http://schemas.microsoft.com/office/drawing/2014/main" id="{2C1FBBE3-1B68-8CF5-74AF-F7154A07CBF9}"/>
+              </a:ext>
+            </a:extLst>
+          </p:cNvPr>
+          <p:cNvSpPr>
+            <a:spLocks noGrp="1"/>
+          </p:cNvSpPr>
+          <p:nvPr>
+            <p:ph type="body" idx="1"/>
+          </p:nvPr>
+        </p:nvSpPr>
+        <p:spPr/>
+        <p:txBody>
+          <a:bodyPr/>
+          <a:lstStyle/>
+          <a:p>
+            <a:endParaRPr lang="zh-TW" altLang="en-US">
+              <a:latin typeface="Microsoft JhengHei UI" panose="020B0604030504040204" pitchFamily="34" charset="-120"/>
+              <a:ea typeface="Microsoft JhengHei UI" panose="020B0604030504040204" pitchFamily="34" charset="-120"/>
+            </a:endParaRPr>
+          </a:p>
+        </p:txBody>
+      </p:sp>
+      <p:sp>
+        <p:nvSpPr>
+          <p:cNvPr id="4" name="投影片編號版面配置區 3">
+            <a:extLst>
+              <a:ext uri="{FF2B5EF4-FFF2-40B4-BE49-F238E27FC236}">
+                <a16:creationId xmlns:a16="http://schemas.microsoft.com/office/drawing/2014/main" id="{480B3349-3DF1-4862-F635-4DF03A389DBE}"/>
+              </a:ext>
+            </a:extLst>
+          </p:cNvPr>
+          <p:cNvSpPr>
+            <a:spLocks noGrp="1"/>
+          </p:cNvSpPr>
+          <p:nvPr>
+            <p:ph type="sldNum" sz="quarter" idx="5"/>
+          </p:nvPr>
+        </p:nvSpPr>
+        <p:spPr/>
+        <p:txBody>
+          <a:bodyPr/>
+          <a:lstStyle/>
+          <a:p>
+            <a:pPr rtl="0"/>
+            <a:fld id="{F97DC217-DF71-1A49-B3EA-559F1F43B0FF}" type="slidenum">
+              <a:rPr lang="en-US" altLang="zh-TW" smtClean="0">
+                <a:latin typeface="Microsoft JhengHei UI" panose="020B0604030504040204" pitchFamily="34" charset="-120"/>
+                <a:ea typeface="Microsoft JhengHei UI" panose="020B0604030504040204" pitchFamily="34" charset="-120"/>
+              </a:rPr>
+              <a:t>15</a:t>
+            </a:fld>
+            <a:endParaRPr lang="zh-TW" altLang="en-US">
+              <a:latin typeface="Microsoft JhengHei UI" panose="020B0604030504040204" pitchFamily="34" charset="-120"/>
+              <a:ea typeface="Microsoft JhengHei UI" panose="020B0604030504040204" pitchFamily="34" charset="-120"/>
+            </a:endParaRPr>
+          </a:p>
+        </p:txBody>
+      </p:sp>
+    </p:spTree>
+    <p:extLst>
+      <p:ext uri="{BB962C8B-B14F-4D97-AF65-F5344CB8AC3E}">
+        <p14:creationId xmlns:p14="http://schemas.microsoft.com/office/powerpoint/2010/main" val="365584763"/>
       </p:ext>
     </p:extLst>
   </p:cSld>
@@ -3491,7 +3729,7 @@
           <a:p>
             <a:fld id="{253E2FD9-212C-4634-B9BE-2B64514F2F1C}" type="datetime1">
               <a:rPr lang="zh-TW" altLang="en-US" noProof="0" smtClean="0"/>
-              <a:t>2026/3/13</a:t>
+              <a:t>2026/3/15</a:t>
             </a:fld>
             <a:endParaRPr lang="zh-TW" altLang="en-US" noProof="0"/>
           </a:p>
@@ -4394,7 +4632,7 @@
           <a:p>
             <a:fld id="{66B557A9-0E5D-4096-B4AD-E75F2E23F2DD}" type="datetime1">
               <a:rPr lang="zh-TW" altLang="en-US" noProof="0" smtClean="0"/>
-              <a:t>2026/3/13</a:t>
+              <a:t>2026/3/15</a:t>
             </a:fld>
             <a:endParaRPr lang="zh-TW" altLang="en-US" noProof="0"/>
           </a:p>
@@ -5597,7 +5835,7 @@
           <a:p>
             <a:fld id="{F179ADB2-D8DE-499A-9C24-143BE3DCBD4B}" type="datetime1">
               <a:rPr lang="zh-TW" altLang="en-US" noProof="0" smtClean="0"/>
-              <a:t>2026/3/13</a:t>
+              <a:t>2026/3/15</a:t>
             </a:fld>
             <a:endParaRPr lang="zh-TW" altLang="en-US" noProof="0"/>
           </a:p>
@@ -7730,7 +7968,7 @@
           <a:p>
             <a:fld id="{771E5EC9-0AE7-4DA6-91A2-BEB118ECAB88}" type="datetime1">
               <a:rPr lang="zh-TW" altLang="en-US" noProof="0" smtClean="0"/>
-              <a:t>2026/3/13</a:t>
+              <a:t>2026/3/15</a:t>
             </a:fld>
             <a:endParaRPr lang="zh-TW" altLang="en-US" noProof="0"/>
           </a:p>
@@ -8464,7 +8702,7 @@
           <a:p>
             <a:fld id="{ED008D3D-DF24-4E70-8D79-942759761C05}" type="datetime1">
               <a:rPr lang="zh-TW" altLang="en-US" noProof="0" smtClean="0"/>
-              <a:t>2026/3/13</a:t>
+              <a:t>2026/3/15</a:t>
             </a:fld>
             <a:endParaRPr lang="zh-TW" altLang="en-US" noProof="0"/>
           </a:p>
@@ -9722,7 +9960,7 @@
           <a:p>
             <a:fld id="{9FB5FF82-8C05-4030-AB2C-90DFCE26C19B}" type="datetime1">
               <a:rPr lang="zh-TW" altLang="en-US" noProof="0" smtClean="0"/>
-              <a:t>2026/3/13</a:t>
+              <a:t>2026/3/15</a:t>
             </a:fld>
             <a:endParaRPr lang="zh-TW" altLang="en-US" noProof="0"/>
           </a:p>
@@ -10327,7 +10565,7 @@
           <a:p>
             <a:fld id="{DD97CEFB-BE58-4E85-9425-C51300490EF7}" type="datetime1">
               <a:rPr lang="zh-TW" altLang="en-US" noProof="0" smtClean="0"/>
-              <a:t>2026/3/13</a:t>
+              <a:t>2026/3/15</a:t>
             </a:fld>
             <a:endParaRPr lang="zh-TW" altLang="en-US" noProof="0"/>
           </a:p>
@@ -10806,7 +11044,7 @@
           <a:p>
             <a:fld id="{40F68810-067D-4444-BD62-8A5F6BA385C9}" type="datetime1">
               <a:rPr lang="zh-TW" altLang="en-US" noProof="0" smtClean="0"/>
-              <a:t>2026/3/13</a:t>
+              <a:t>2026/3/15</a:t>
             </a:fld>
             <a:endParaRPr lang="zh-TW" altLang="en-US" noProof="0"/>
           </a:p>
@@ -11674,7 +11912,7 @@
           <a:p>
             <a:fld id="{048C0665-835A-4CF9-BF7B-6D8A73E19DEE}" type="datetime1">
               <a:rPr lang="zh-TW" altLang="en-US" noProof="0" smtClean="0"/>
-              <a:t>2026/3/13</a:t>
+              <a:t>2026/3/15</a:t>
             </a:fld>
             <a:endParaRPr lang="zh-TW" altLang="en-US" noProof="0"/>
           </a:p>
@@ -13955,7 +14193,7 @@
           <a:p>
             <a:fld id="{675623E1-5DCE-4542-968C-BF94A11D2DD4}" type="datetime1">
               <a:rPr lang="zh-TW" altLang="en-US" noProof="0" smtClean="0"/>
-              <a:t>2026/3/13</a:t>
+              <a:t>2026/3/15</a:t>
             </a:fld>
             <a:endParaRPr lang="zh-TW" altLang="en-US" noProof="0"/>
           </a:p>
@@ -14227,7 +14465,7 @@
           <a:p>
             <a:fld id="{FCF827C6-B0FB-4CAB-9C5C-422F7C1B12BD}" type="datetime1">
               <a:rPr lang="zh-TW" altLang="en-US" noProof="0" smtClean="0"/>
-              <a:t>2026/3/13</a:t>
+              <a:t>2026/3/15</a:t>
             </a:fld>
             <a:endParaRPr lang="zh-TW" altLang="en-US" noProof="0"/>
           </a:p>
@@ -14851,6 +15089,293 @@
         <p:cNvPr id="1" name="">
           <a:extLst>
             <a:ext uri="{FF2B5EF4-FFF2-40B4-BE49-F238E27FC236}">
+              <a16:creationId xmlns:a16="http://schemas.microsoft.com/office/drawing/2014/main" id="{457E2BCF-BE25-65AC-B974-6EDCE9BEA36F}"/>
+            </a:ext>
+          </a:extLst>
+        </p:cNvPr>
+        <p:cNvGrpSpPr/>
+        <p:nvPr/>
+      </p:nvGrpSpPr>
+      <p:grpSpPr>
+        <a:xfrm>
+          <a:off x="0" y="0"/>
+          <a:ext cx="0" cy="0"/>
+          <a:chOff x="0" y="0"/>
+          <a:chExt cx="0" cy="0"/>
+        </a:xfrm>
+      </p:grpSpPr>
+      <p:sp>
+        <p:nvSpPr>
+          <p:cNvPr id="2" name="標題 1">
+            <a:extLst>
+              <a:ext uri="{FF2B5EF4-FFF2-40B4-BE49-F238E27FC236}">
+                <a16:creationId xmlns:a16="http://schemas.microsoft.com/office/drawing/2014/main" id="{915C5FC2-06F9-A4DD-1244-45A16584A63D}"/>
+              </a:ext>
+            </a:extLst>
+          </p:cNvPr>
+          <p:cNvSpPr>
+            <a:spLocks noGrp="1"/>
+          </p:cNvSpPr>
+          <p:nvPr>
+            <p:ph type="title"/>
+          </p:nvPr>
+        </p:nvSpPr>
+        <p:spPr/>
+        <p:txBody>
+          <a:bodyPr rtlCol="0"/>
+          <a:lstStyle/>
+          <a:p>
+            <a:r>
+              <a:rPr lang="zh-TW" altLang="en-US" dirty="0"/>
+              <a:t>結果分析</a:t>
+            </a:r>
+            <a:r>
+              <a:rPr lang="zh-TW" altLang="en-US" sz="1800" dirty="0"/>
+              <a:t>研究團隊在香港的多處市區與郊區峽谷進行靜態實驗</a:t>
+            </a:r>
+            <a:endParaRPr lang="zh-TW" altLang="en-US" dirty="0"/>
+          </a:p>
+        </p:txBody>
+      </p:sp>
+      <p:pic>
+        <p:nvPicPr>
+          <p:cNvPr id="4" name="圖片 3">
+            <a:extLst>
+              <a:ext uri="{FF2B5EF4-FFF2-40B4-BE49-F238E27FC236}">
+                <a16:creationId xmlns:a16="http://schemas.microsoft.com/office/drawing/2014/main" id="{28C7E03E-9C00-055A-8EC4-19478D6AF9B5}"/>
+              </a:ext>
+            </a:extLst>
+          </p:cNvPr>
+          <p:cNvPicPr>
+            <a:picLocks noChangeAspect="1"/>
+          </p:cNvPicPr>
+          <p:nvPr/>
+        </p:nvPicPr>
+        <p:blipFill>
+          <a:blip r:embed="rId3"/>
+          <a:stretch>
+            <a:fillRect/>
+          </a:stretch>
+        </p:blipFill>
+        <p:spPr>
+          <a:xfrm>
+            <a:off x="598607" y="2225372"/>
+            <a:ext cx="4820323" cy="2534004"/>
+          </a:xfrm>
+          <a:prstGeom prst="rect">
+            <a:avLst/>
+          </a:prstGeom>
+          <a:solidFill>
+            <a:srgbClr val="FFFFFF">
+              <a:shade val="85000"/>
+            </a:srgbClr>
+          </a:solidFill>
+          <a:ln w="88900" cap="sq">
+            <a:solidFill>
+              <a:srgbClr val="FFFFFF"/>
+            </a:solidFill>
+            <a:miter lim="800000"/>
+          </a:ln>
+          <a:effectLst>
+            <a:outerShdw blurRad="55000" dist="18000" dir="5400000" algn="tl" rotWithShape="0">
+              <a:srgbClr val="000000">
+                <a:alpha val="40000"/>
+              </a:srgbClr>
+            </a:outerShdw>
+          </a:effectLst>
+          <a:scene3d>
+            <a:camera prst="orthographicFront"/>
+            <a:lightRig rig="twoPt" dir="t">
+              <a:rot lat="0" lon="0" rev="7200000"/>
+            </a:lightRig>
+          </a:scene3d>
+          <a:sp3d>
+            <a:bevelT w="25400" h="19050"/>
+            <a:contourClr>
+              <a:srgbClr val="FFFFFF"/>
+            </a:contourClr>
+          </a:sp3d>
+        </p:spPr>
+      </p:pic>
+      <p:pic>
+        <p:nvPicPr>
+          <p:cNvPr id="6" name="圖片 5">
+            <a:extLst>
+              <a:ext uri="{FF2B5EF4-FFF2-40B4-BE49-F238E27FC236}">
+                <a16:creationId xmlns:a16="http://schemas.microsoft.com/office/drawing/2014/main" id="{B4CA01CB-3A67-74A0-1123-F98C9E1A941F}"/>
+              </a:ext>
+            </a:extLst>
+          </p:cNvPr>
+          <p:cNvPicPr>
+            <a:picLocks noChangeAspect="1"/>
+          </p:cNvPicPr>
+          <p:nvPr/>
+        </p:nvPicPr>
+        <p:blipFill>
+          <a:blip r:embed="rId4"/>
+          <a:srcRect l="4231" b="2413"/>
+          <a:stretch>
+            <a:fillRect/>
+          </a:stretch>
+        </p:blipFill>
+        <p:spPr>
+          <a:xfrm>
+            <a:off x="6096000" y="1857127"/>
+            <a:ext cx="4643776" cy="3476874"/>
+          </a:xfrm>
+          <a:prstGeom prst="rect">
+            <a:avLst/>
+          </a:prstGeom>
+          <a:solidFill>
+            <a:srgbClr val="FFFFFF">
+              <a:shade val="85000"/>
+            </a:srgbClr>
+          </a:solidFill>
+          <a:ln w="88900" cap="sq">
+            <a:solidFill>
+              <a:srgbClr val="FFFFFF"/>
+            </a:solidFill>
+            <a:miter lim="800000"/>
+          </a:ln>
+          <a:effectLst>
+            <a:outerShdw blurRad="55000" dist="18000" dir="5400000" algn="tl" rotWithShape="0">
+              <a:srgbClr val="000000">
+                <a:alpha val="40000"/>
+              </a:srgbClr>
+            </a:outerShdw>
+          </a:effectLst>
+          <a:scene3d>
+            <a:camera prst="orthographicFront"/>
+            <a:lightRig rig="twoPt" dir="t">
+              <a:rot lat="0" lon="0" rev="7200000"/>
+            </a:lightRig>
+          </a:scene3d>
+          <a:sp3d>
+            <a:bevelT w="25400" h="19050"/>
+            <a:contourClr>
+              <a:srgbClr val="FFFFFF"/>
+            </a:contourClr>
+          </a:sp3d>
+        </p:spPr>
+      </p:pic>
+      <p:sp>
+        <p:nvSpPr>
+          <p:cNvPr id="11" name="文字方塊 10">
+            <a:extLst>
+              <a:ext uri="{FF2B5EF4-FFF2-40B4-BE49-F238E27FC236}">
+                <a16:creationId xmlns:a16="http://schemas.microsoft.com/office/drawing/2014/main" id="{0F64E0CE-ADD4-B1F6-2A34-71520A336E94}"/>
+              </a:ext>
+            </a:extLst>
+          </p:cNvPr>
+          <p:cNvSpPr txBox="1"/>
+          <p:nvPr/>
+        </p:nvSpPr>
+        <p:spPr>
+          <a:xfrm>
+            <a:off x="1713297" y="5484565"/>
+            <a:ext cx="9233378" cy="923330"/>
+          </a:xfrm>
+          <a:prstGeom prst="rect">
+            <a:avLst/>
+          </a:prstGeom>
+          <a:noFill/>
+        </p:spPr>
+        <p:txBody>
+          <a:bodyPr wrap="square">
+            <a:spAutoFit/>
+          </a:bodyPr>
+          <a:lstStyle/>
+          <a:p>
+            <a:r>
+              <a:rPr lang="zh-TW" altLang="en-US" dirty="0">
+                <a:latin typeface="標楷體" panose="03000509000000000000" pitchFamily="65" charset="-120"/>
+              </a:rPr>
+              <a:t>這張圖展示了 </a:t>
+            </a:r>
+            <a:r>
+              <a:rPr lang="en-US" altLang="zh-TW" b="1" dirty="0">
+                <a:latin typeface="標楷體" panose="03000509000000000000" pitchFamily="65" charset="-120"/>
+              </a:rPr>
+              <a:t>3D </a:t>
+            </a:r>
+            <a:r>
+              <a:rPr lang="zh-TW" altLang="en-US" b="1" dirty="0">
+                <a:latin typeface="標楷體" panose="03000509000000000000" pitchFamily="65" charset="-120"/>
+              </a:rPr>
+              <a:t>城市地圖輔助（</a:t>
+            </a:r>
+            <a:r>
+              <a:rPr lang="en-US" altLang="zh-TW" b="1" dirty="0">
+                <a:latin typeface="標楷體" panose="03000509000000000000" pitchFamily="65" charset="-120"/>
+              </a:rPr>
+              <a:t>3DMA</a:t>
+            </a:r>
+            <a:r>
+              <a:rPr lang="zh-TW" altLang="en-US" b="1" dirty="0">
+                <a:latin typeface="標楷體" panose="03000509000000000000" pitchFamily="65" charset="-120"/>
+              </a:rPr>
+              <a:t>）技術</a:t>
+            </a:r>
+            <a:r>
+              <a:rPr lang="zh-TW" altLang="en-US" dirty="0">
+                <a:latin typeface="標楷體" panose="03000509000000000000" pitchFamily="65" charset="-120"/>
+              </a:rPr>
+              <a:t> 如何透過識別建築物遮蔽區域（灰色部分），精確剔除或修正錯誤的衛星訊號（紅點），從而在複雜都市環境中大幅降低定位誤差，將近 </a:t>
+            </a:r>
+            <a:r>
+              <a:rPr lang="en-US" altLang="zh-TW" b="1" dirty="0">
+                <a:latin typeface="標楷體" panose="03000509000000000000" pitchFamily="65" charset="-120"/>
+              </a:rPr>
+              <a:t>80%</a:t>
+            </a:r>
+            <a:r>
+              <a:rPr lang="zh-TW" altLang="en-US" dirty="0">
+                <a:latin typeface="標楷體" panose="03000509000000000000" pitchFamily="65" charset="-120"/>
+              </a:rPr>
+              <a:t> 的定位點精確度提升達 </a:t>
+            </a:r>
+            <a:r>
+              <a:rPr lang="en-US" altLang="zh-TW" b="1" dirty="0">
+                <a:latin typeface="標楷體" panose="03000509000000000000" pitchFamily="65" charset="-120"/>
+              </a:rPr>
+              <a:t>2 </a:t>
+            </a:r>
+            <a:r>
+              <a:rPr lang="zh-TW" altLang="en-US" b="1" dirty="0">
+                <a:latin typeface="標楷體" panose="03000509000000000000" pitchFamily="65" charset="-120"/>
+              </a:rPr>
+              <a:t>公尺</a:t>
+            </a:r>
+            <a:r>
+              <a:rPr lang="zh-TW" altLang="en-US" dirty="0">
+                <a:latin typeface="標楷體" panose="03000509000000000000" pitchFamily="65" charset="-120"/>
+              </a:rPr>
+              <a:t> 以上</a:t>
+            </a:r>
+          </a:p>
+        </p:txBody>
+      </p:sp>
+    </p:spTree>
+    <p:extLst>
+      <p:ext uri="{BB962C8B-B14F-4D97-AF65-F5344CB8AC3E}">
+        <p14:creationId xmlns:p14="http://schemas.microsoft.com/office/powerpoint/2010/main" val="944064826"/>
+      </p:ext>
+    </p:extLst>
+  </p:cSld>
+  <p:clrMapOvr>
+    <a:masterClrMapping/>
+  </p:clrMapOvr>
+</p:sld>
+</file>
+
+<file path=ppt/slides/slide11.xml><?xml version="1.0" encoding="utf-8"?>
+<p:sld xmlns:a="http://schemas.openxmlformats.org/drawingml/2006/main" xmlns:r="http://schemas.openxmlformats.org/officeDocument/2006/relationships" xmlns:p="http://schemas.openxmlformats.org/presentationml/2006/main">
+  <p:cSld>
+    <p:spTree>
+      <p:nvGrpSpPr>
+        <p:cNvPr id="1" name="">
+          <a:extLst>
+            <a:ext uri="{FF2B5EF4-FFF2-40B4-BE49-F238E27FC236}">
               <a16:creationId xmlns:a16="http://schemas.microsoft.com/office/drawing/2014/main" id="{0BE37459-543C-B136-B956-1AB2BB358AC8}"/>
             </a:ext>
           </a:extLst>
@@ -14917,7 +15442,7 @@
 </p:sld>
 </file>
 
-<file path=ppt/slides/slide11.xml><?xml version="1.0" encoding="utf-8"?>
+<file path=ppt/slides/slide12.xml><?xml version="1.0" encoding="utf-8"?>
 <p:sld xmlns:a="http://schemas.openxmlformats.org/drawingml/2006/main" xmlns:r="http://schemas.openxmlformats.org/officeDocument/2006/relationships" xmlns:p="http://schemas.openxmlformats.org/presentationml/2006/main">
   <p:cSld>
     <p:spTree>
@@ -15006,42 +15531,83 @@
               <a:buChar char="n"/>
             </a:pPr>
             <a:r>
-              <a:rPr lang="zh-TW" altLang="en-US" b="1" dirty="0"/>
+              <a:rPr lang="zh-TW" altLang="en-US" b="1" dirty="0">
+                <a:latin typeface="標楷體" panose="03000509000000000000" pitchFamily="65" charset="-120"/>
+              </a:rPr>
               <a:t>運算負載問題</a:t>
             </a:r>
             <a:r>
-              <a:rPr lang="zh-TW" altLang="en-US" dirty="0"/>
+              <a:rPr lang="zh-TW" altLang="en-US" dirty="0">
+                <a:latin typeface="標楷體" panose="03000509000000000000" pitchFamily="65" charset="-120"/>
+              </a:rPr>
               <a:t>：由於需要在大量候選點上重複解算，</a:t>
             </a:r>
             <a:r>
-              <a:rPr lang="en-US" altLang="zh-TW" dirty="0"/>
+              <a:rPr lang="en-US" altLang="zh-TW" dirty="0">
+                <a:latin typeface="標楷體" panose="03000509000000000000" pitchFamily="65" charset="-120"/>
+              </a:rPr>
               <a:t>3DMA GNSS RTK </a:t>
             </a:r>
             <a:r>
-              <a:rPr lang="zh-TW" altLang="en-US" dirty="0"/>
+              <a:rPr lang="zh-TW" altLang="en-US" dirty="0">
+                <a:latin typeface="標楷體" panose="03000509000000000000" pitchFamily="65" charset="-120"/>
+              </a:rPr>
               <a:t>的單次運算時間長達約 </a:t>
             </a:r>
             <a:r>
-              <a:rPr lang="en-US" altLang="zh-TW" dirty="0"/>
+              <a:rPr lang="en-US" altLang="zh-TW" dirty="0">
+                <a:latin typeface="標楷體" panose="03000509000000000000" pitchFamily="65" charset="-120"/>
+              </a:rPr>
               <a:t>22 </a:t>
             </a:r>
             <a:r>
-              <a:rPr lang="zh-TW" altLang="en-US" dirty="0"/>
-              <a:t>秒（傳統方法僅需 </a:t>
-            </a:r>
-            <a:r>
-              <a:rPr lang="en-US" altLang="zh-TW" dirty="0"/>
+              <a:rPr lang="zh-TW" altLang="en-US" dirty="0">
+                <a:latin typeface="標楷體" panose="03000509000000000000" pitchFamily="65" charset="-120"/>
+              </a:rPr>
+              <a:t>秒</a:t>
+            </a:r>
+            <a:r>
+              <a:rPr lang="en-US" altLang="zh-TW" dirty="0">
+                <a:latin typeface="標楷體" panose="03000509000000000000" pitchFamily="65" charset="-120"/>
+              </a:rPr>
+              <a:t>(</a:t>
+            </a:r>
+            <a:r>
+              <a:rPr lang="zh-TW" altLang="en-US" dirty="0">
+                <a:latin typeface="標楷體" panose="03000509000000000000" pitchFamily="65" charset="-120"/>
+              </a:rPr>
+              <a:t>傳統方法僅需 </a:t>
+            </a:r>
+            <a:r>
+              <a:rPr lang="en-US" altLang="zh-TW" dirty="0">
+                <a:latin typeface="標楷體" panose="03000509000000000000" pitchFamily="65" charset="-120"/>
+              </a:rPr>
               <a:t>0.1 </a:t>
             </a:r>
             <a:r>
-              <a:rPr lang="zh-TW" altLang="en-US" dirty="0"/>
-              <a:t>秒），</a:t>
+              <a:rPr lang="zh-TW" altLang="en-US" dirty="0">
+                <a:latin typeface="標楷體" panose="03000509000000000000" pitchFamily="65" charset="-120"/>
+              </a:rPr>
+              <a:t>秒</a:t>
+            </a:r>
+            <a:r>
+              <a:rPr lang="en-US" altLang="zh-TW" dirty="0">
+                <a:latin typeface="標楷體" panose="03000509000000000000" pitchFamily="65" charset="-120"/>
+              </a:rPr>
+              <a:t>)</a:t>
+            </a:r>
+            <a:r>
+              <a:rPr lang="zh-TW" altLang="en-US" dirty="0">
+                <a:latin typeface="標楷體" panose="03000509000000000000" pitchFamily="65" charset="-120"/>
+              </a:rPr>
+              <a:t>，</a:t>
             </a:r>
             <a:r>
               <a:rPr lang="zh-TW" altLang="en-US" dirty="0">
                 <a:solidFill>
                   <a:srgbClr val="FF0000"/>
                 </a:solidFill>
+                <a:latin typeface="標楷體" panose="03000509000000000000" pitchFamily="65" charset="-120"/>
               </a:rPr>
               <a:t>目前難以應用於即時運算</a:t>
             </a:r>
@@ -15049,6 +15615,7 @@
               <a:solidFill>
                 <a:srgbClr val="FF0000"/>
               </a:solidFill>
+              <a:latin typeface="標楷體" panose="03000509000000000000" pitchFamily="65" charset="-120"/>
             </a:endParaRPr>
           </a:p>
           <a:p>
@@ -15075,7 +15642,7 @@
 </p:sld>
 </file>
 
-<file path=ppt/slides/slide12.xml><?xml version="1.0" encoding="utf-8"?>
+<file path=ppt/slides/slide13.xml><?xml version="1.0" encoding="utf-8"?>
 <p:sld xmlns:a="http://schemas.openxmlformats.org/drawingml/2006/main" xmlns:r="http://schemas.openxmlformats.org/officeDocument/2006/relationships" xmlns:p="http://schemas.openxmlformats.org/presentationml/2006/main">
   <p:cSld>
     <p:spTree>
@@ -15210,7 +15777,7 @@
 </p:sld>
 </file>
 
-<file path=ppt/slides/slide13.xml><?xml version="1.0" encoding="utf-8"?>
+<file path=ppt/slides/slide14.xml><?xml version="1.0" encoding="utf-8"?>
 <p:sld xmlns:a="http://schemas.openxmlformats.org/drawingml/2006/main" xmlns:r="http://schemas.openxmlformats.org/officeDocument/2006/relationships" xmlns:p="http://schemas.openxmlformats.org/presentationml/2006/main">
   <p:cSld>
     <p:spTree>
@@ -15218,7 +15785,7 @@
         <p:cNvPr id="1" name="">
           <a:extLst>
             <a:ext uri="{FF2B5EF4-FFF2-40B4-BE49-F238E27FC236}">
-              <a16:creationId xmlns:a16="http://schemas.microsoft.com/office/drawing/2014/main" id="{38740C70-407F-54F0-4E34-6EEB8B86738E}"/>
+              <a16:creationId xmlns:a16="http://schemas.microsoft.com/office/drawing/2014/main" id="{F3B05644-603D-28C3-FB65-D2BF109ABCDF}"/>
             </a:ext>
           </a:extLst>
         </p:cNvPr>
@@ -15238,7 +15805,7 @@
           <p:cNvPr id="2" name="標題 1">
             <a:extLst>
               <a:ext uri="{FF2B5EF4-FFF2-40B4-BE49-F238E27FC236}">
-                <a16:creationId xmlns:a16="http://schemas.microsoft.com/office/drawing/2014/main" id="{8AC235C6-AE0C-CDB8-8576-F69A3C4DD556}"/>
+                <a16:creationId xmlns:a16="http://schemas.microsoft.com/office/drawing/2014/main" id="{0109C40E-D9D3-AE52-3D73-4242C5CE4FFB}"/>
               </a:ext>
             </a:extLst>
           </p:cNvPr>
@@ -15266,7 +15833,7 @@
           <p:cNvPr id="9" name="文字方塊 8">
             <a:extLst>
               <a:ext uri="{FF2B5EF4-FFF2-40B4-BE49-F238E27FC236}">
-                <a16:creationId xmlns:a16="http://schemas.microsoft.com/office/drawing/2014/main" id="{46EDC99C-DEC3-6A2B-71C2-010B0E072872}"/>
+                <a16:creationId xmlns:a16="http://schemas.microsoft.com/office/drawing/2014/main" id="{8BD51B9D-65B1-A12F-EBDF-90D131F71D2F}"/>
               </a:ext>
             </a:extLst>
           </p:cNvPr>
@@ -15276,7 +15843,7 @@
         <p:spPr>
           <a:xfrm>
             <a:off x="1357312" y="2199459"/>
-            <a:ext cx="9129713" cy="2585323"/>
+            <a:ext cx="9129713" cy="3693319"/>
           </a:xfrm>
           <a:prstGeom prst="rect">
             <a:avLst/>
@@ -15294,53 +15861,77 @@
               <a:buChar char="n"/>
             </a:pPr>
             <a:r>
-              <a:rPr lang="en-US" altLang="zh-TW" dirty="0"/>
+              <a:rPr lang="en-US" altLang="zh-TW" dirty="0">
+                <a:latin typeface="標楷體" panose="03000509000000000000" pitchFamily="65" charset="-120"/>
+              </a:rPr>
               <a:t>RTK (Real-Time Kinematic) </a:t>
             </a:r>
             <a:r>
-              <a:rPr lang="zh-TW" altLang="en-US" dirty="0"/>
+              <a:rPr lang="zh-TW" altLang="en-US" dirty="0">
+                <a:latin typeface="標楷體" panose="03000509000000000000" pitchFamily="65" charset="-120"/>
+              </a:rPr>
               <a:t>：</a:t>
             </a:r>
             <a:r>
-              <a:rPr lang="en-US" altLang="zh-TW" dirty="0"/>
+              <a:rPr lang="en-US" altLang="zh-TW" dirty="0">
+                <a:latin typeface="標楷體" panose="03000509000000000000" pitchFamily="65" charset="-120"/>
+              </a:rPr>
               <a:t>RTK </a:t>
             </a:r>
             <a:r>
-              <a:rPr lang="zh-TW" altLang="en-US" dirty="0"/>
+              <a:rPr lang="zh-TW" altLang="en-US" dirty="0">
+                <a:latin typeface="標楷體" panose="03000509000000000000" pitchFamily="65" charset="-120"/>
+              </a:rPr>
               <a:t>是一種透過</a:t>
             </a:r>
             <a:r>
-              <a:rPr lang="zh-TW" altLang="en-US" b="1" dirty="0"/>
+              <a:rPr lang="zh-TW" altLang="en-US" b="1" dirty="0">
+                <a:latin typeface="標楷體" panose="03000509000000000000" pitchFamily="65" charset="-120"/>
+              </a:rPr>
               <a:t>基準站</a:t>
             </a:r>
             <a:r>
-              <a:rPr lang="zh-TW" altLang="en-US" dirty="0"/>
+              <a:rPr lang="zh-TW" altLang="en-US" dirty="0">
+                <a:latin typeface="標楷體" panose="03000509000000000000" pitchFamily="65" charset="-120"/>
+              </a:rPr>
               <a:t>發送修正訊號，將 </a:t>
             </a:r>
             <a:r>
-              <a:rPr lang="en-US" altLang="zh-TW" dirty="0"/>
+              <a:rPr lang="en-US" altLang="zh-TW" dirty="0">
+                <a:latin typeface="標楷體" panose="03000509000000000000" pitchFamily="65" charset="-120"/>
+              </a:rPr>
               <a:t>GPS </a:t>
             </a:r>
             <a:r>
-              <a:rPr lang="zh-TW" altLang="en-US" dirty="0"/>
+              <a:rPr lang="zh-TW" altLang="en-US" dirty="0">
+                <a:latin typeface="標楷體" panose="03000509000000000000" pitchFamily="65" charset="-120"/>
+              </a:rPr>
               <a:t>定位精確度從公尺級提升至</a:t>
             </a:r>
             <a:r>
-              <a:rPr lang="zh-TW" altLang="en-US" b="1" dirty="0"/>
+              <a:rPr lang="zh-TW" altLang="en-US" b="1" dirty="0">
+                <a:latin typeface="標楷體" panose="03000509000000000000" pitchFamily="65" charset="-120"/>
+              </a:rPr>
               <a:t>公分級</a:t>
             </a:r>
             <a:r>
-              <a:rPr lang="zh-TW" altLang="en-US" dirty="0"/>
+              <a:rPr lang="zh-TW" altLang="en-US" dirty="0">
+                <a:latin typeface="標楷體" panose="03000509000000000000" pitchFamily="65" charset="-120"/>
+              </a:rPr>
               <a:t>的即時差分定位技術</a:t>
             </a:r>
-            <a:endParaRPr lang="en-US" altLang="zh-TW" dirty="0"/>
+            <a:endParaRPr lang="en-US" altLang="zh-TW" dirty="0">
+              <a:latin typeface="標楷體" panose="03000509000000000000" pitchFamily="65" charset="-120"/>
+            </a:endParaRPr>
           </a:p>
           <a:p>
             <a:pPr marL="285750" indent="-285750">
               <a:buFont typeface="Wingdings" panose="05000000000000000000" pitchFamily="2" charset="2"/>
               <a:buChar char="n"/>
             </a:pPr>
-            <a:endParaRPr lang="en-US" altLang="zh-TW" dirty="0"/>
+            <a:endParaRPr lang="en-US" altLang="zh-TW" dirty="0">
+              <a:latin typeface="標楷體" panose="03000509000000000000" pitchFamily="65" charset="-120"/>
+            </a:endParaRPr>
           </a:p>
           <a:p>
             <a:pPr marL="285750" indent="-285750">
@@ -15348,25 +15939,34 @@
               <a:buChar char="n"/>
             </a:pPr>
             <a:r>
-              <a:rPr lang="en-US" altLang="zh-TW" dirty="0"/>
+              <a:rPr lang="en-US" altLang="zh-TW" dirty="0">
+                <a:latin typeface="標楷體" panose="03000509000000000000" pitchFamily="65" charset="-120"/>
+              </a:rPr>
               <a:t>GNSS </a:t>
             </a:r>
             <a:r>
-              <a:rPr lang="zh-TW" altLang="en-US" dirty="0"/>
-              <a:t>是所有導航衛星系統（如 </a:t>
-            </a:r>
-            <a:r>
-              <a:rPr lang="en-US" altLang="zh-TW" dirty="0"/>
+              <a:rPr lang="zh-TW" altLang="en-US" dirty="0">
+                <a:latin typeface="標楷體" panose="03000509000000000000" pitchFamily="65" charset="-120"/>
+              </a:rPr>
+              <a:t>是所有導航衛星系統</a:t>
+            </a:r>
+            <a:r>
+              <a:rPr lang="en-US" altLang="zh-TW" dirty="0">
+                <a:latin typeface="標楷體" panose="03000509000000000000" pitchFamily="65" charset="-120"/>
+              </a:rPr>
               <a:t>GPS</a:t>
             </a:r>
             <a:r>
-              <a:rPr lang="zh-TW" altLang="en-US" dirty="0"/>
-              <a:t>、北斗等）的統稱，利用多組衛星群提供全球覆蓋的定位服務。 。</a:t>
+              <a:rPr lang="zh-TW" altLang="en-US" dirty="0">
+                <a:latin typeface="標楷體" panose="03000509000000000000" pitchFamily="65" charset="-120"/>
+              </a:rPr>
+              <a:t>的統稱，利用多組衛星群提供全球覆蓋的定位服務。 </a:t>
             </a:r>
             <a:endParaRPr lang="en-US" altLang="zh-TW" dirty="0">
               <a:solidFill>
                 <a:srgbClr val="FF0000"/>
               </a:solidFill>
+              <a:latin typeface="標楷體" panose="03000509000000000000" pitchFamily="65" charset="-120"/>
             </a:endParaRPr>
           </a:p>
           <a:p>
@@ -15384,37 +15984,128 @@
               <a:buChar char="n"/>
             </a:pPr>
             <a:r>
-              <a:rPr lang="en-US" altLang="zh-TW" dirty="0"/>
+              <a:rPr lang="en-US" altLang="zh-TW" dirty="0">
+                <a:latin typeface="標楷體" panose="03000509000000000000" pitchFamily="65" charset="-120"/>
+              </a:rPr>
               <a:t>GNSS RTK</a:t>
             </a:r>
             <a:r>
-              <a:rPr lang="zh-TW" altLang="en-US" dirty="0"/>
+              <a:rPr lang="zh-TW" altLang="en-US" dirty="0">
+                <a:latin typeface="標楷體" panose="03000509000000000000" pitchFamily="65" charset="-120"/>
+              </a:rPr>
               <a:t> 是將「全球衛星導航系統 </a:t>
             </a:r>
             <a:r>
-              <a:rPr lang="en-US" altLang="zh-TW" dirty="0"/>
+              <a:rPr lang="en-US" altLang="zh-TW" dirty="0">
+                <a:latin typeface="標楷體" panose="03000509000000000000" pitchFamily="65" charset="-120"/>
+              </a:rPr>
               <a:t>(GNSS)</a:t>
             </a:r>
             <a:r>
-              <a:rPr lang="zh-TW" altLang="en-US" dirty="0"/>
+              <a:rPr lang="zh-TW" altLang="en-US" dirty="0">
+                <a:latin typeface="標楷體" panose="03000509000000000000" pitchFamily="65" charset="-120"/>
+              </a:rPr>
               <a:t>」與「即時動態差分技術 </a:t>
             </a:r>
             <a:r>
-              <a:rPr lang="en-US" altLang="zh-TW" dirty="0"/>
+              <a:rPr lang="en-US" altLang="zh-TW" dirty="0">
+                <a:latin typeface="標楷體" panose="03000509000000000000" pitchFamily="65" charset="-120"/>
+              </a:rPr>
               <a:t>(RTK)</a:t>
             </a:r>
             <a:r>
-              <a:rPr lang="zh-TW" altLang="en-US" dirty="0"/>
+              <a:rPr lang="zh-TW" altLang="en-US" dirty="0">
+                <a:latin typeface="標楷體" panose="03000509000000000000" pitchFamily="65" charset="-120"/>
+              </a:rPr>
               <a:t>」結合的技術。它是目前民用領域中，獲取</a:t>
             </a:r>
             <a:r>
-              <a:rPr lang="zh-TW" altLang="en-US" b="1" dirty="0"/>
+              <a:rPr lang="zh-TW" altLang="en-US" b="1" dirty="0">
+                <a:latin typeface="標楷體" panose="03000509000000000000" pitchFamily="65" charset="-120"/>
+              </a:rPr>
               <a:t>高精度即時位置</a:t>
             </a:r>
             <a:r>
-              <a:rPr lang="zh-TW" altLang="en-US" dirty="0"/>
+              <a:rPr lang="zh-TW" altLang="en-US" dirty="0">
+                <a:latin typeface="標楷體" panose="03000509000000000000" pitchFamily="65" charset="-120"/>
+              </a:rPr>
               <a:t>最經濟且高效的方法。</a:t>
             </a:r>
+            <a:endParaRPr lang="en-US" altLang="zh-TW" dirty="0">
+              <a:latin typeface="標楷體" panose="03000509000000000000" pitchFamily="65" charset="-120"/>
+            </a:endParaRPr>
+          </a:p>
+          <a:p>
+            <a:pPr marL="285750" indent="-285750">
+              <a:buFont typeface="Wingdings" panose="05000000000000000000" pitchFamily="2" charset="2"/>
+              <a:buChar char="n"/>
+            </a:pPr>
+            <a:endParaRPr lang="en-US" altLang="zh-TW" dirty="0">
+              <a:latin typeface="標楷體" panose="03000509000000000000" pitchFamily="65" charset="-120"/>
+            </a:endParaRPr>
+          </a:p>
+          <a:p>
+            <a:pPr marL="285750" indent="-285750">
+              <a:buFont typeface="Wingdings" panose="05000000000000000000" pitchFamily="2" charset="2"/>
+              <a:buChar char="n"/>
+            </a:pPr>
+            <a:r>
+              <a:rPr lang="en-US" altLang="zh-TW" b="1" dirty="0">
+                <a:latin typeface="標楷體" panose="03000509000000000000" pitchFamily="65" charset="-120"/>
+              </a:rPr>
+              <a:t>NLOS (</a:t>
+            </a:r>
+            <a:r>
+              <a:rPr lang="zh-TW" altLang="en-US" b="1" dirty="0">
+                <a:latin typeface="標楷體" panose="03000509000000000000" pitchFamily="65" charset="-120"/>
+              </a:rPr>
+              <a:t>非視距訊號</a:t>
+            </a:r>
+            <a:r>
+              <a:rPr lang="en-US" altLang="zh-TW" b="1" dirty="0">
+                <a:latin typeface="標楷體" panose="03000509000000000000" pitchFamily="65" charset="-120"/>
+              </a:rPr>
+              <a:t>, Non-Line-Of-Sight)</a:t>
+            </a:r>
+            <a:r>
+              <a:rPr lang="zh-TW" altLang="en-US" dirty="0">
+                <a:latin typeface="標楷體" panose="03000509000000000000" pitchFamily="65" charset="-120"/>
+              </a:rPr>
+              <a:t>：指那些「沒有直接照射到接收器</a:t>
+            </a:r>
+            <a:r>
+              <a:rPr lang="en-US" altLang="zh-TW" dirty="0">
+                <a:latin typeface="標楷體" panose="03000509000000000000" pitchFamily="65" charset="-120"/>
+              </a:rPr>
+              <a:t>(</a:t>
+            </a:r>
+            <a:r>
+              <a:rPr lang="zh-TW" altLang="en-US" b="1" dirty="0">
+                <a:latin typeface="標楷體" panose="03000509000000000000" pitchFamily="65" charset="-120"/>
+              </a:rPr>
+              <a:t>基準站</a:t>
+            </a:r>
+            <a:r>
+              <a:rPr lang="en-US" altLang="zh-TW" dirty="0">
+                <a:latin typeface="標楷體" panose="03000509000000000000" pitchFamily="65" charset="-120"/>
+              </a:rPr>
+              <a:t>)</a:t>
+            </a:r>
+            <a:r>
+              <a:rPr lang="zh-TW" altLang="en-US" dirty="0">
+                <a:latin typeface="標楷體" panose="03000509000000000000" pitchFamily="65" charset="-120"/>
+              </a:rPr>
+              <a:t>，而是被建築物擋住後反射或折射才到達的衛星訊號。這些繞路的訊號包含了錯誤的距離資訊，是造成都市定位產生巨大誤差的元兇</a:t>
+            </a:r>
+          </a:p>
+          <a:p>
+            <a:pPr marL="285750" indent="-285750">
+              <a:buFont typeface="Wingdings" panose="05000000000000000000" pitchFamily="2" charset="2"/>
+              <a:buChar char="n"/>
+            </a:pPr>
+            <a:endParaRPr lang="zh-TW" altLang="en-US" dirty="0">
+              <a:latin typeface="標楷體" panose="03000509000000000000" pitchFamily="65" charset="-120"/>
+            </a:endParaRPr>
           </a:p>
           <a:p>
             <a:pPr marL="285750" indent="-285750">
@@ -15430,7 +16121,412 @@
     </p:spTree>
     <p:extLst>
       <p:ext uri="{BB962C8B-B14F-4D97-AF65-F5344CB8AC3E}">
-        <p14:creationId xmlns:p14="http://schemas.microsoft.com/office/powerpoint/2010/main" val="2521981922"/>
+        <p14:creationId xmlns:p14="http://schemas.microsoft.com/office/powerpoint/2010/main" val="3366451214"/>
+      </p:ext>
+    </p:extLst>
+  </p:cSld>
+  <p:clrMapOvr>
+    <a:masterClrMapping/>
+  </p:clrMapOvr>
+</p:sld>
+</file>
+
+<file path=ppt/slides/slide15.xml><?xml version="1.0" encoding="utf-8"?>
+<p:sld xmlns:a="http://schemas.openxmlformats.org/drawingml/2006/main" xmlns:r="http://schemas.openxmlformats.org/officeDocument/2006/relationships" xmlns:p="http://schemas.openxmlformats.org/presentationml/2006/main">
+  <p:cSld>
+    <p:spTree>
+      <p:nvGrpSpPr>
+        <p:cNvPr id="1" name="">
+          <a:extLst>
+            <a:ext uri="{FF2B5EF4-FFF2-40B4-BE49-F238E27FC236}">
+              <a16:creationId xmlns:a16="http://schemas.microsoft.com/office/drawing/2014/main" id="{3FA51CB8-ED24-9439-8066-E91D1943129E}"/>
+            </a:ext>
+          </a:extLst>
+        </p:cNvPr>
+        <p:cNvGrpSpPr/>
+        <p:nvPr/>
+      </p:nvGrpSpPr>
+      <p:grpSpPr>
+        <a:xfrm>
+          <a:off x="0" y="0"/>
+          <a:ext cx="0" cy="0"/>
+          <a:chOff x="0" y="0"/>
+          <a:chExt cx="0" cy="0"/>
+        </a:xfrm>
+      </p:grpSpPr>
+      <p:sp>
+        <p:nvSpPr>
+          <p:cNvPr id="2" name="標題 1">
+            <a:extLst>
+              <a:ext uri="{FF2B5EF4-FFF2-40B4-BE49-F238E27FC236}">
+                <a16:creationId xmlns:a16="http://schemas.microsoft.com/office/drawing/2014/main" id="{D9433BFE-34F3-FF62-6D54-F7225EF611B7}"/>
+              </a:ext>
+            </a:extLst>
+          </p:cNvPr>
+          <p:cNvSpPr>
+            <a:spLocks noGrp="1"/>
+          </p:cNvSpPr>
+          <p:nvPr>
+            <p:ph type="title"/>
+          </p:nvPr>
+        </p:nvSpPr>
+        <p:spPr/>
+        <p:txBody>
+          <a:bodyPr rtlCol="0"/>
+          <a:lstStyle/>
+          <a:p>
+            <a:r>
+              <a:rPr lang="zh-TW" altLang="en-US" dirty="0"/>
+              <a:t>名詞解釋</a:t>
+            </a:r>
+          </a:p>
+        </p:txBody>
+      </p:sp>
+      <p:sp>
+        <p:nvSpPr>
+          <p:cNvPr id="9" name="文字方塊 8">
+            <a:extLst>
+              <a:ext uri="{FF2B5EF4-FFF2-40B4-BE49-F238E27FC236}">
+                <a16:creationId xmlns:a16="http://schemas.microsoft.com/office/drawing/2014/main" id="{CF7AFF69-502B-2903-1CE7-A1AD6EE80267}"/>
+              </a:ext>
+            </a:extLst>
+          </p:cNvPr>
+          <p:cNvSpPr txBox="1"/>
+          <p:nvPr/>
+        </p:nvSpPr>
+        <p:spPr>
+          <a:xfrm>
+            <a:off x="1357312" y="2199459"/>
+            <a:ext cx="9129713" cy="4801314"/>
+          </a:xfrm>
+          <a:prstGeom prst="rect">
+            <a:avLst/>
+          </a:prstGeom>
+          <a:noFill/>
+        </p:spPr>
+        <p:txBody>
+          <a:bodyPr wrap="square" rtlCol="0">
+            <a:spAutoFit/>
+          </a:bodyPr>
+          <a:lstStyle/>
+          <a:p>
+            <a:pPr marL="285750" indent="-285750">
+              <a:buFont typeface="Wingdings" panose="05000000000000000000" pitchFamily="2" charset="2"/>
+              <a:buChar char="n"/>
+            </a:pPr>
+            <a:r>
+              <a:rPr lang="en-US" altLang="zh-TW" b="1" dirty="0">
+                <a:latin typeface="標楷體" panose="03000509000000000000" pitchFamily="65" charset="-120"/>
+              </a:rPr>
+              <a:t>3DMA (3D</a:t>
+            </a:r>
+            <a:r>
+              <a:rPr lang="zh-TW" altLang="en-US" b="1" dirty="0">
+                <a:latin typeface="標楷體" panose="03000509000000000000" pitchFamily="65" charset="-120"/>
+              </a:rPr>
+              <a:t>地圖輔助</a:t>
+            </a:r>
+            <a:r>
+              <a:rPr lang="en-US" altLang="zh-TW" b="1" dirty="0">
+                <a:latin typeface="標楷體" panose="03000509000000000000" pitchFamily="65" charset="-120"/>
+              </a:rPr>
+              <a:t>, 3D Mapping-Aided)</a:t>
+            </a:r>
+            <a:r>
+              <a:rPr lang="zh-TW" altLang="en-US" dirty="0">
+                <a:latin typeface="標楷體" panose="03000509000000000000" pitchFamily="65" charset="-120"/>
+              </a:rPr>
+              <a:t>：一種利用 </a:t>
+            </a:r>
+            <a:r>
+              <a:rPr lang="en-US" altLang="zh-TW" b="1" dirty="0">
+                <a:latin typeface="標楷體" panose="03000509000000000000" pitchFamily="65" charset="-120"/>
+              </a:rPr>
+              <a:t>3D </a:t>
+            </a:r>
+            <a:r>
+              <a:rPr lang="zh-TW" altLang="en-US" b="1" dirty="0">
+                <a:latin typeface="標楷體" panose="03000509000000000000" pitchFamily="65" charset="-120"/>
+              </a:rPr>
+              <a:t>城市建築模型</a:t>
+            </a:r>
+            <a:r>
+              <a:rPr lang="zh-TW" altLang="en-US" dirty="0">
+                <a:latin typeface="標楷體" panose="03000509000000000000" pitchFamily="65" charset="-120"/>
+              </a:rPr>
+              <a:t>來幫忙定位的技術概念。系統透過預先知道周圍高樓的幾何形狀，來判斷並</a:t>
+            </a:r>
+            <a:r>
+              <a:rPr lang="zh-TW" altLang="en-US" b="1" dirty="0">
+                <a:latin typeface="標楷體" panose="03000509000000000000" pitchFamily="65" charset="-120"/>
+              </a:rPr>
+              <a:t>過濾掉</a:t>
+            </a:r>
+            <a:r>
+              <a:rPr lang="zh-TW" altLang="en-US" dirty="0">
+                <a:latin typeface="標楷體" panose="03000509000000000000" pitchFamily="65" charset="-120"/>
+              </a:rPr>
+              <a:t>那些「不可能直接看到」的 </a:t>
+            </a:r>
+            <a:r>
+              <a:rPr lang="en-US" altLang="zh-TW" dirty="0">
+                <a:latin typeface="標楷體" panose="03000509000000000000" pitchFamily="65" charset="-120"/>
+              </a:rPr>
+              <a:t>NLOS </a:t>
+            </a:r>
+            <a:r>
+              <a:rPr lang="zh-TW" altLang="en-US" dirty="0">
+                <a:latin typeface="標楷體" panose="03000509000000000000" pitchFamily="65" charset="-120"/>
+              </a:rPr>
+              <a:t>衛星，只留下健康的訊號來計算位置</a:t>
+            </a:r>
+            <a:endParaRPr lang="en-US" altLang="zh-TW" dirty="0">
+              <a:latin typeface="標楷體" panose="03000509000000000000" pitchFamily="65" charset="-120"/>
+            </a:endParaRPr>
+          </a:p>
+          <a:p>
+            <a:pPr marL="285750" indent="-285750">
+              <a:buFont typeface="Wingdings" panose="05000000000000000000" pitchFamily="2" charset="2"/>
+              <a:buChar char="n"/>
+            </a:pPr>
+            <a:endParaRPr lang="en-US" altLang="zh-TW" dirty="0">
+              <a:latin typeface="標楷體" panose="03000509000000000000" pitchFamily="65" charset="-120"/>
+            </a:endParaRPr>
+          </a:p>
+          <a:p>
+            <a:pPr marL="285750" indent="-285750">
+              <a:buFont typeface="Wingdings" panose="05000000000000000000" pitchFamily="2" charset="2"/>
+              <a:buChar char="n"/>
+            </a:pPr>
+            <a:r>
+              <a:rPr lang="en-US" altLang="zh-TW" b="1" dirty="0" err="1">
+                <a:latin typeface="標楷體" panose="03000509000000000000" pitchFamily="65" charset="-120"/>
+              </a:rPr>
+              <a:t>Skymask</a:t>
+            </a:r>
+            <a:r>
+              <a:rPr lang="en-US" altLang="zh-TW" b="1" dirty="0">
+                <a:latin typeface="標楷體" panose="03000509000000000000" pitchFamily="65" charset="-120"/>
+              </a:rPr>
+              <a:t> (</a:t>
+            </a:r>
+            <a:r>
+              <a:rPr lang="zh-TW" altLang="en-US" b="1" dirty="0">
+                <a:latin typeface="標楷體" panose="03000509000000000000" pitchFamily="65" charset="-120"/>
+              </a:rPr>
+              <a:t>天際線遮罩</a:t>
+            </a:r>
+            <a:r>
+              <a:rPr lang="en-US" altLang="zh-TW" b="1" dirty="0">
+                <a:latin typeface="標楷體" panose="03000509000000000000" pitchFamily="65" charset="-120"/>
+              </a:rPr>
+              <a:t>)</a:t>
+            </a:r>
+            <a:r>
+              <a:rPr lang="zh-TW" altLang="en-US" dirty="0">
+                <a:latin typeface="標楷體" panose="03000509000000000000" pitchFamily="65" charset="-120"/>
+              </a:rPr>
+              <a:t>：</a:t>
+            </a:r>
+            <a:r>
+              <a:rPr lang="zh-TW" altLang="en-US" b="1" dirty="0">
+                <a:latin typeface="標楷體" panose="03000509000000000000" pitchFamily="65" charset="-120"/>
+              </a:rPr>
+              <a:t>簡單解釋</a:t>
+            </a:r>
+            <a:r>
+              <a:rPr lang="zh-TW" altLang="en-US" dirty="0">
+                <a:latin typeface="標楷體" panose="03000509000000000000" pitchFamily="65" charset="-120"/>
+              </a:rPr>
+              <a:t>：它是 </a:t>
+            </a:r>
+            <a:r>
+              <a:rPr lang="en-US" altLang="zh-TW" dirty="0">
+                <a:latin typeface="標楷體" panose="03000509000000000000" pitchFamily="65" charset="-120"/>
+              </a:rPr>
+              <a:t>3D </a:t>
+            </a:r>
+            <a:r>
+              <a:rPr lang="zh-TW" altLang="en-US" dirty="0">
+                <a:latin typeface="標楷體" panose="03000509000000000000" pitchFamily="65" charset="-120"/>
+              </a:rPr>
+              <a:t>地圖在定位系統中的具體應用形式。你可以把它想像成一張從你所在位置往上看天空的「</a:t>
+            </a:r>
+            <a:r>
+              <a:rPr lang="zh-TW" altLang="en-US" b="1" dirty="0">
+                <a:latin typeface="標楷體" panose="03000509000000000000" pitchFamily="65" charset="-120"/>
+              </a:rPr>
+              <a:t>建築物邊界圖</a:t>
+            </a:r>
+            <a:r>
+              <a:rPr lang="zh-TW" altLang="en-US" dirty="0">
+                <a:latin typeface="標楷體" panose="03000509000000000000" pitchFamily="65" charset="-120"/>
+              </a:rPr>
+              <a:t>」。系統利用這張圖，就能一眼看出天空中的某顆衛星是高於建築物</a:t>
+            </a:r>
+            <a:r>
+              <a:rPr lang="en-US" altLang="zh-TW" dirty="0">
+                <a:latin typeface="標楷體" panose="03000509000000000000" pitchFamily="65" charset="-120"/>
+              </a:rPr>
+              <a:t>(</a:t>
+            </a:r>
+            <a:r>
+              <a:rPr lang="zh-TW" altLang="en-US" dirty="0">
+                <a:latin typeface="標楷體" panose="03000509000000000000" pitchFamily="65" charset="-120"/>
+              </a:rPr>
+              <a:t>健康訊號</a:t>
+            </a:r>
+            <a:r>
+              <a:rPr lang="en-US" altLang="zh-TW" dirty="0">
+                <a:latin typeface="標楷體" panose="03000509000000000000" pitchFamily="65" charset="-120"/>
+              </a:rPr>
+              <a:t>)</a:t>
+            </a:r>
+            <a:r>
+              <a:rPr lang="zh-TW" altLang="en-US" dirty="0">
+                <a:latin typeface="標楷體" panose="03000509000000000000" pitchFamily="65" charset="-120"/>
+              </a:rPr>
+              <a:t>，還是被建築物擋住</a:t>
+            </a:r>
+            <a:r>
+              <a:rPr lang="en-US" altLang="zh-TW" dirty="0">
+                <a:latin typeface="標楷體" panose="03000509000000000000" pitchFamily="65" charset="-120"/>
+              </a:rPr>
+              <a:t>(</a:t>
+            </a:r>
+            <a:r>
+              <a:rPr lang="zh-TW" altLang="en-US" dirty="0">
+                <a:latin typeface="標楷體" panose="03000509000000000000" pitchFamily="65" charset="-120"/>
+              </a:rPr>
+              <a:t>不健康訊號</a:t>
+            </a:r>
+          </a:p>
+          <a:p>
+            <a:pPr marL="285750" indent="-285750">
+              <a:buFont typeface="Wingdings" panose="05000000000000000000" pitchFamily="2" charset="2"/>
+              <a:buChar char="n"/>
+            </a:pPr>
+            <a:endParaRPr lang="en-US" altLang="zh-TW" dirty="0">
+              <a:latin typeface="標楷體" panose="03000509000000000000" pitchFamily="65" charset="-120"/>
+            </a:endParaRPr>
+          </a:p>
+          <a:p>
+            <a:pPr marL="285750" indent="-285750">
+              <a:buFont typeface="Wingdings" panose="05000000000000000000" pitchFamily="2" charset="2"/>
+              <a:buChar char="n"/>
+            </a:pPr>
+            <a:r>
+              <a:rPr lang="en-US" altLang="zh-TW" b="1" dirty="0">
+                <a:latin typeface="標楷體" panose="03000509000000000000" pitchFamily="65" charset="-120"/>
+              </a:rPr>
+              <a:t>BIE estimator (</a:t>
+            </a:r>
+            <a:r>
+              <a:rPr lang="zh-TW" altLang="en-US" b="1" dirty="0">
+                <a:latin typeface="標楷體" panose="03000509000000000000" pitchFamily="65" charset="-120"/>
+              </a:rPr>
+              <a:t>最佳整數等變量估計器</a:t>
+            </a:r>
+            <a:r>
+              <a:rPr lang="en-US" altLang="zh-TW" b="1" dirty="0">
+                <a:latin typeface="標楷體" panose="03000509000000000000" pitchFamily="65" charset="-120"/>
+              </a:rPr>
+              <a:t>, Best Integer Equivariant estimator)</a:t>
+            </a:r>
+            <a:r>
+              <a:rPr lang="zh-TW" altLang="en-US" dirty="0">
+                <a:latin typeface="標楷體" panose="03000509000000000000" pitchFamily="65" charset="-120"/>
+              </a:rPr>
+              <a:t>：</a:t>
+            </a:r>
+            <a:r>
+              <a:rPr lang="zh-TW" altLang="en-US" b="1" dirty="0">
+                <a:latin typeface="標楷體" panose="03000509000000000000" pitchFamily="65" charset="-120"/>
+              </a:rPr>
+              <a:t>簡單解釋</a:t>
+            </a:r>
+            <a:r>
+              <a:rPr lang="zh-TW" altLang="en-US" dirty="0">
+                <a:latin typeface="標楷體" panose="03000509000000000000" pitchFamily="65" charset="-120"/>
+              </a:rPr>
+              <a:t>：這是一種用來算出最準確座標的</a:t>
+            </a:r>
+            <a:r>
+              <a:rPr lang="zh-TW" altLang="en-US" b="1" dirty="0">
+                <a:latin typeface="標楷體" panose="03000509000000000000" pitchFamily="65" charset="-120"/>
+              </a:rPr>
+              <a:t>數學計算方法</a:t>
+            </a:r>
+            <a:r>
+              <a:rPr lang="en-US" altLang="zh-TW" dirty="0">
+                <a:latin typeface="標楷體" panose="03000509000000000000" pitchFamily="65" charset="-120"/>
+              </a:rPr>
+              <a:t>(</a:t>
+            </a:r>
+            <a:r>
+              <a:rPr lang="zh-TW" altLang="en-US" dirty="0">
+                <a:latin typeface="標楷體" panose="03000509000000000000" pitchFamily="65" charset="-120"/>
+              </a:rPr>
+              <a:t>用於模糊度解算</a:t>
+            </a:r>
+            <a:r>
+              <a:rPr lang="en-US" altLang="zh-TW" dirty="0">
+                <a:latin typeface="標楷體" panose="03000509000000000000" pitchFamily="65" charset="-120"/>
+              </a:rPr>
+              <a:t>)</a:t>
+            </a:r>
+            <a:r>
+              <a:rPr lang="zh-TW" altLang="en-US" dirty="0">
+                <a:latin typeface="標楷體" panose="03000509000000000000" pitchFamily="65" charset="-120"/>
+              </a:rPr>
+              <a:t>。在充滿雜訊的都市中，傳統方法如果挑錯一個解，誤差就會爆表；而 </a:t>
+            </a:r>
+            <a:r>
+              <a:rPr lang="en-US" altLang="zh-TW" dirty="0">
+                <a:latin typeface="標楷體" panose="03000509000000000000" pitchFamily="65" charset="-120"/>
+              </a:rPr>
+              <a:t>BIE </a:t>
+            </a:r>
+            <a:r>
+              <a:rPr lang="zh-TW" altLang="en-US" dirty="0">
+                <a:latin typeface="標楷體" panose="03000509000000000000" pitchFamily="65" charset="-120"/>
+              </a:rPr>
+              <a:t>方法則是將多個可能的候選解答進行「加權平均」，因此在應對不良訊號時，能提供更穩定且精準的結果</a:t>
+            </a:r>
+          </a:p>
+          <a:p>
+            <a:pPr marL="285750" indent="-285750">
+              <a:buFont typeface="Wingdings" panose="05000000000000000000" pitchFamily="2" charset="2"/>
+              <a:buChar char="n"/>
+            </a:pPr>
+            <a:endParaRPr lang="zh-TW" altLang="en-US" dirty="0">
+              <a:latin typeface="標楷體" panose="03000509000000000000" pitchFamily="65" charset="-120"/>
+            </a:endParaRPr>
+          </a:p>
+          <a:p>
+            <a:pPr marL="285750" indent="-285750">
+              <a:buFont typeface="Wingdings" panose="05000000000000000000" pitchFamily="2" charset="2"/>
+              <a:buChar char="n"/>
+            </a:pPr>
+            <a:endParaRPr lang="zh-TW" altLang="en-US" dirty="0">
+              <a:latin typeface="標楷體" panose="03000509000000000000" pitchFamily="65" charset="-120"/>
+            </a:endParaRPr>
+          </a:p>
+          <a:p>
+            <a:pPr marL="285750" indent="-285750">
+              <a:buFont typeface="Wingdings" panose="05000000000000000000" pitchFamily="2" charset="2"/>
+              <a:buChar char="n"/>
+            </a:pPr>
+            <a:endParaRPr lang="en-US" altLang="zh-TW" dirty="0">
+              <a:latin typeface="Google Sans Text"/>
+            </a:endParaRPr>
+          </a:p>
+        </p:txBody>
+      </p:sp>
+    </p:spTree>
+    <p:extLst>
+      <p:ext uri="{BB962C8B-B14F-4D97-AF65-F5344CB8AC3E}">
+        <p14:creationId xmlns:p14="http://schemas.microsoft.com/office/powerpoint/2010/main" val="450403980"/>
       </p:ext>
     </p:extLst>
   </p:cSld>
@@ -15666,96 +16762,6 @@
       </p:sp>
       <p:sp>
         <p:nvSpPr>
-          <p:cNvPr id="3" name="日期版面配置區 2">
-            <a:extLst>
-              <a:ext uri="{FF2B5EF4-FFF2-40B4-BE49-F238E27FC236}">
-                <a16:creationId xmlns:a16="http://schemas.microsoft.com/office/drawing/2014/main" id="{6DB30D50-1377-244D-A1A4-32FB836C1F3A}"/>
-              </a:ext>
-            </a:extLst>
-          </p:cNvPr>
-          <p:cNvSpPr>
-            <a:spLocks noGrp="1"/>
-          </p:cNvSpPr>
-          <p:nvPr>
-            <p:ph type="dt" sz="half" idx="2"/>
-          </p:nvPr>
-        </p:nvSpPr>
-        <p:spPr/>
-        <p:txBody>
-          <a:bodyPr rtlCol="0"/>
-          <a:lstStyle/>
-          <a:p>
-            <a:pPr rtl="0"/>
-            <a:fld id="{6029FDC3-7F04-49BB-A012-C10ED2668038}" type="datetime1">
-              <a:rPr lang="en-US" altLang="zh-TW" smtClean="0"/>
-              <a:t>3/13/2026</a:t>
-            </a:fld>
-            <a:endParaRPr lang="zh-TW" altLang="en-US" dirty="0"/>
-          </a:p>
-        </p:txBody>
-      </p:sp>
-      <p:sp>
-        <p:nvSpPr>
-          <p:cNvPr id="5" name="頁尾版面配置區 4">
-            <a:extLst>
-              <a:ext uri="{FF2B5EF4-FFF2-40B4-BE49-F238E27FC236}">
-                <a16:creationId xmlns:a16="http://schemas.microsoft.com/office/drawing/2014/main" id="{AA926C73-F226-914E-AC56-BF3172765F9F}"/>
-              </a:ext>
-            </a:extLst>
-          </p:cNvPr>
-          <p:cNvSpPr>
-            <a:spLocks noGrp="1"/>
-          </p:cNvSpPr>
-          <p:nvPr>
-            <p:ph type="ftr" sz="quarter" idx="3"/>
-          </p:nvPr>
-        </p:nvSpPr>
-        <p:spPr/>
-        <p:txBody>
-          <a:bodyPr rtlCol="0"/>
-          <a:lstStyle/>
-          <a:p>
-            <a:pPr rtl="0"/>
-            <a:r>
-              <a:rPr lang="zh-TW" altLang="en-US" dirty="0"/>
-              <a:t>簡報標題</a:t>
-            </a:r>
-          </a:p>
-        </p:txBody>
-      </p:sp>
-      <p:sp>
-        <p:nvSpPr>
-          <p:cNvPr id="7" name="投影片編號版面配置區 6">
-            <a:extLst>
-              <a:ext uri="{FF2B5EF4-FFF2-40B4-BE49-F238E27FC236}">
-                <a16:creationId xmlns:a16="http://schemas.microsoft.com/office/drawing/2014/main" id="{50A86E01-62BB-5145-A6C3-515717DD327C}"/>
-              </a:ext>
-            </a:extLst>
-          </p:cNvPr>
-          <p:cNvSpPr>
-            <a:spLocks noGrp="1"/>
-          </p:cNvSpPr>
-          <p:nvPr>
-            <p:ph type="sldNum" sz="quarter" idx="4"/>
-          </p:nvPr>
-        </p:nvSpPr>
-        <p:spPr/>
-        <p:txBody>
-          <a:bodyPr rtlCol="0"/>
-          <a:lstStyle/>
-          <a:p>
-            <a:pPr rtl="0"/>
-            <a:fld id="{294A09A9-5501-47C1-A89A-A340965A2BE2}" type="slidenum">
-              <a:rPr lang="en-US" altLang="zh-TW" smtClean="0"/>
-              <a:pPr rtl="0"/>
-              <a:t>4</a:t>
-            </a:fld>
-            <a:endParaRPr lang="zh-TW" altLang="en-US" dirty="0"/>
-          </a:p>
-        </p:txBody>
-      </p:sp>
-      <p:sp>
-        <p:nvSpPr>
           <p:cNvPr id="9" name="文字方塊 8">
             <a:extLst>
               <a:ext uri="{FF2B5EF4-FFF2-40B4-BE49-F238E27FC236}">
@@ -15798,21 +16804,27 @@
                 <a:effectLst/>
                 <a:latin typeface="Google Sans Text"/>
               </a:rPr>
-              <a:t>：諸如無人機等新興的自主系統，需要公分級的高精度定位，而即時動態定位技術（</a:t>
+              <a:t>：諸如無人機等新興的自主系統，需要公分級的高精度定位，而即時動態定位技術</a:t>
             </a:r>
             <a:r>
               <a:rPr lang="en-US" altLang="zh-TW" b="0" i="0" dirty="0">
                 <a:effectLst/>
                 <a:latin typeface="Google Sans Text"/>
               </a:rPr>
-              <a:t>GNSSRTK</a:t>
+              <a:t>(GNSSRTK</a:t>
+            </a:r>
+            <a:r>
+              <a:rPr lang="en-US" altLang="zh-TW" dirty="0">
+                <a:latin typeface="Google Sans Text"/>
+              </a:rPr>
+              <a:t>)</a:t>
             </a:r>
             <a:r>
               <a:rPr lang="zh-TW" altLang="en-US" b="0" i="0" dirty="0">
                 <a:effectLst/>
                 <a:latin typeface="Google Sans Text"/>
               </a:rPr>
-              <a:t>）具備滿足此需求的潛力，雖然</a:t>
+              <a:t>具備滿足此需求的潛力，雖然</a:t>
             </a:r>
             <a:r>
               <a:rPr lang="en-US" altLang="zh-TW" b="0" i="0" dirty="0">
@@ -15826,35 +16838,35 @@
                 <a:effectLst/>
                 <a:latin typeface="Google Sans Text"/>
               </a:rPr>
-              <a:t>在開闊天空下能提供公分級精度，但在充滿高樓的「都市峽谷」中，因嚴重的多路徑效應（</a:t>
+              <a:t>在開闊天空下能提供公分級精度，但在充滿高樓的「都市峽谷」中，因嚴重的多路徑效應</a:t>
             </a:r>
             <a:r>
               <a:rPr lang="en-US" altLang="zh-TW" b="0" i="0" dirty="0">
                 <a:effectLst/>
                 <a:latin typeface="Google Sans Text"/>
               </a:rPr>
-              <a:t>Multipath</a:t>
+              <a:t>(Multipath)</a:t>
             </a:r>
             <a:r>
               <a:rPr lang="zh-TW" altLang="en-US" b="0" i="0" dirty="0">
                 <a:effectLst/>
                 <a:latin typeface="Google Sans Text"/>
               </a:rPr>
-              <a:t>）與非視距（</a:t>
+              <a:t>與非視距</a:t>
             </a:r>
             <a:r>
               <a:rPr lang="en-US" altLang="zh-TW" b="0" i="0" dirty="0">
                 <a:effectLst/>
                 <a:latin typeface="Google Sans Text"/>
               </a:rPr>
-              <a:t>NLOS</a:t>
+              <a:t>(NLOS)</a:t>
             </a:r>
             <a:r>
               <a:rPr lang="zh-TW" altLang="en-US" b="0" i="0" dirty="0">
                 <a:effectLst/>
                 <a:latin typeface="Google Sans Text"/>
               </a:rPr>
-              <a:t>）訊號傳播，其效能受到極大限制</a:t>
+              <a:t>訊號傳播，其效能受到極大限制</a:t>
             </a:r>
             <a:endParaRPr lang="en-US" altLang="zh-TW" b="0" i="0" dirty="0">
               <a:effectLst/>
@@ -15901,21 +16913,21 @@
                 <a:effectLst/>
                 <a:latin typeface="Google Sans Text"/>
               </a:rPr>
-              <a:t>光達（</a:t>
+              <a:t>光達</a:t>
             </a:r>
             <a:r>
               <a:rPr lang="en-US" altLang="zh-TW" b="0" i="0" dirty="0">
                 <a:effectLst/>
                 <a:latin typeface="Google Sans Text"/>
               </a:rPr>
-              <a:t>LiDAR</a:t>
+              <a:t>(LiDAR)</a:t>
             </a:r>
             <a:r>
               <a:rPr lang="zh-TW" altLang="en-US" b="0" i="0" dirty="0">
                 <a:effectLst/>
                 <a:latin typeface="Google Sans Text"/>
               </a:rPr>
-              <a:t>）以識別</a:t>
+              <a:t>以識別</a:t>
             </a:r>
             <a:r>
               <a:rPr lang="en-US" altLang="zh-TW" b="0" i="0" dirty="0">
@@ -15929,21 +16941,49 @@
                 <a:effectLst/>
                 <a:latin typeface="Google Sans Text"/>
               </a:rPr>
-              <a:t>訊號，或是單純提高衛星仰角遮罩（例如設定</a:t>
+              <a:t>訊號，或是單純提高衛星仰角遮罩</a:t>
             </a:r>
             <a:r>
               <a:rPr lang="en-US" altLang="zh-TW" b="0" i="0" dirty="0">
                 <a:effectLst/>
                 <a:latin typeface="Google Sans Text"/>
               </a:rPr>
-              <a:t>35</a:t>
+              <a:t>(</a:t>
             </a:r>
             <a:r>
               <a:rPr lang="zh-TW" altLang="en-US" b="0" i="0" dirty="0">
                 <a:effectLst/>
                 <a:latin typeface="Google Sans Text"/>
               </a:rPr>
-              <a:t>度以上的仰角）。然而，額外硬體不適用於所有情境，且固定的仰角遮罩在建築物分佈不均的環境中效果有限</a:t>
+              <a:t>例如設定</a:t>
+            </a:r>
+            <a:r>
+              <a:rPr lang="en-US" altLang="zh-TW" b="0" i="0" dirty="0">
+                <a:effectLst/>
+                <a:latin typeface="Google Sans Text"/>
+              </a:rPr>
+              <a:t>35</a:t>
+            </a:r>
+            <a:r>
+              <a:rPr lang="zh-TW" altLang="en-US" b="0" i="0" dirty="0">
+                <a:effectLst/>
+                <a:latin typeface="Google Sans Text"/>
+              </a:rPr>
+              <a:t>度以上的仰角</a:t>
+            </a:r>
+            <a:r>
+              <a:rPr lang="en-US" altLang="zh-TW" b="0" i="0" dirty="0">
+                <a:effectLst/>
+                <a:latin typeface="Google Sans Text"/>
+              </a:rPr>
+              <a:t>)</a:t>
+            </a:r>
+            <a:r>
+              <a:rPr lang="zh-TW" altLang="en-US" b="0" i="0" dirty="0">
+                <a:effectLst/>
+                <a:latin typeface="Google Sans Text"/>
+              </a:rPr>
+              <a:t>。然而，額外硬體不適用於所有情境，且固定的仰角遮罩在建築物分佈不均的環境中效果有限</a:t>
             </a:r>
             <a:endParaRPr lang="en-US" altLang="zh-TW" dirty="0">
               <a:latin typeface="Google Sans Text"/>
@@ -15978,90 +17018,106 @@
               <a:t>：提出「</a:t>
             </a:r>
             <a:r>
+              <a:rPr lang="en-US" altLang="zh-TW" b="1" i="0" dirty="0">
+                <a:effectLst/>
+                <a:latin typeface="Google Sans Text"/>
+              </a:rPr>
+              <a:t>3D</a:t>
+            </a:r>
+            <a:r>
+              <a:rPr lang="zh-TW" altLang="en-US" b="1" i="0" dirty="0">
+                <a:effectLst/>
+                <a:latin typeface="Google Sans Text"/>
+              </a:rPr>
+              <a:t>地圖資料庫輔助</a:t>
+            </a:r>
+            <a:r>
+              <a:rPr lang="en-US" altLang="zh-TW" b="1" i="0" dirty="0">
+                <a:effectLst/>
+                <a:latin typeface="Google Sans Text"/>
+              </a:rPr>
+              <a:t>GNSSRTK</a:t>
+            </a:r>
+            <a:r>
+              <a:rPr lang="zh-TW" altLang="en-US" b="0" i="0" dirty="0">
+                <a:effectLst/>
+                <a:latin typeface="Google Sans Text"/>
+              </a:rPr>
+              <a:t>」</a:t>
+            </a:r>
+            <a:r>
               <a:rPr lang="en-US" altLang="zh-TW" b="0" i="0" dirty="0">
                 <a:effectLst/>
                 <a:latin typeface="Google Sans Text"/>
               </a:rPr>
-              <a:t>3D</a:t>
+              <a:t>(3DMAGNSSRTK)</a:t>
             </a:r>
             <a:r>
               <a:rPr lang="zh-TW" altLang="en-US" b="0" i="0" dirty="0">
                 <a:effectLst/>
                 <a:latin typeface="Google Sans Text"/>
               </a:rPr>
-              <a:t>地圖資料庫輔助</a:t>
+              <a:t>演算法，利用</a:t>
             </a:r>
             <a:r>
               <a:rPr lang="en-US" altLang="zh-TW" b="0" i="0" dirty="0">
                 <a:effectLst/>
                 <a:latin typeface="Google Sans Text"/>
               </a:rPr>
-              <a:t>GNSSRTK</a:t>
+              <a:t>3D</a:t>
             </a:r>
             <a:r>
               <a:rPr lang="zh-TW" altLang="en-US" b="0" i="0" dirty="0">
                 <a:effectLst/>
                 <a:latin typeface="Google Sans Text"/>
               </a:rPr>
-              <a:t>」（</a:t>
+              <a:t>建築模型搭配「位置假設」</a:t>
             </a:r>
             <a:r>
               <a:rPr lang="en-US" altLang="zh-TW" b="0" i="0" dirty="0">
                 <a:effectLst/>
                 <a:latin typeface="Google Sans Text"/>
               </a:rPr>
-              <a:t>3DMAGNSSRTK</a:t>
+              <a:t>(</a:t>
+            </a:r>
+            <a:r>
+              <a:rPr lang="en-US" altLang="zh-TW" b="0" i="0" dirty="0" err="1">
+                <a:effectLst/>
+                <a:latin typeface="Google Sans Text"/>
+              </a:rPr>
+              <a:t>positionhypothesis</a:t>
+            </a:r>
+            <a:r>
+              <a:rPr lang="en-US" altLang="zh-TW" b="0" i="0" dirty="0">
+                <a:effectLst/>
+                <a:latin typeface="Google Sans Text"/>
+              </a:rPr>
+              <a:t>)</a:t>
             </a:r>
             <a:r>
               <a:rPr lang="zh-TW" altLang="en-US" b="0" i="0" dirty="0">
                 <a:effectLst/>
                 <a:latin typeface="Google Sans Text"/>
               </a:rPr>
-              <a:t>）演算法，利用</a:t>
+              <a:t>來篩選出健康的衛星訊號，從而大幅提升都市環境中的</a:t>
             </a:r>
             <a:r>
               <a:rPr lang="en-US" altLang="zh-TW" b="0" i="0" dirty="0">
                 <a:effectLst/>
                 <a:latin typeface="Google Sans Text"/>
               </a:rPr>
-              <a:t>3D</a:t>
+              <a:t>RTK</a:t>
             </a:r>
             <a:r>
               <a:rPr lang="zh-TW" altLang="en-US" b="0" i="0" dirty="0">
                 <a:effectLst/>
                 <a:latin typeface="Google Sans Text"/>
               </a:rPr>
-              <a:t>建築模型搭配「位置假設」（</a:t>
-            </a:r>
-            <a:r>
-              <a:rPr lang="en-US" altLang="zh-TW" b="0" i="0" dirty="0" err="1">
-                <a:effectLst/>
-                <a:latin typeface="Google Sans Text"/>
-              </a:rPr>
-              <a:t>positionhypothesis</a:t>
-            </a:r>
-            <a:r>
-              <a:rPr lang="zh-TW" altLang="en-US" b="0" i="0" dirty="0">
-                <a:effectLst/>
-                <a:latin typeface="Google Sans Text"/>
-              </a:rPr>
-              <a:t>）來篩選出健康的衛星訊號，從而大幅提升都市環境中的</a:t>
-            </a:r>
-            <a:r>
-              <a:rPr lang="en-US" altLang="zh-TW" b="0" i="0" dirty="0">
-                <a:effectLst/>
-                <a:latin typeface="Google Sans Text"/>
-              </a:rPr>
-              <a:t>RTK</a:t>
-            </a:r>
-            <a:r>
-              <a:rPr lang="zh-TW" altLang="en-US" b="0" i="0" dirty="0">
-                <a:effectLst/>
-                <a:latin typeface="Google Sans Text"/>
-              </a:rPr>
               <a:t>定位準確度</a:t>
             </a:r>
-            <a:endParaRPr lang="zh-TW" altLang="en-US" dirty="0"/>
+            <a:endParaRPr lang="zh-TW" altLang="en-US" dirty="0">
+              <a:latin typeface="標楷體" panose="03000509000000000000" pitchFamily="65" charset="-120"/>
+            </a:endParaRPr>
           </a:p>
         </p:txBody>
       </p:sp>
@@ -16333,7 +17389,7 @@
         <p:spPr>
           <a:xfrm>
             <a:off x="950411" y="1724297"/>
-            <a:ext cx="10710366" cy="4524315"/>
+            <a:ext cx="10710366" cy="4247317"/>
           </a:xfrm>
           <a:prstGeom prst="rect">
             <a:avLst/>
@@ -16351,30 +17407,44 @@
               <a:buChar char="n"/>
             </a:pPr>
             <a:r>
-              <a:rPr lang="zh-TW" altLang="en-US" b="1" dirty="0"/>
+              <a:rPr lang="zh-TW" altLang="en-US" b="1" dirty="0">
+                <a:latin typeface="標楷體" panose="03000509000000000000" pitchFamily="65" charset="-120"/>
+              </a:rPr>
               <a:t>離線階段</a:t>
             </a:r>
             <a:r>
-              <a:rPr lang="en-US" altLang="zh-TW" b="1" dirty="0"/>
+              <a:rPr lang="en-US" altLang="zh-TW" b="1" dirty="0">
+                <a:latin typeface="標楷體" panose="03000509000000000000" pitchFamily="65" charset="-120"/>
+              </a:rPr>
               <a:t>(</a:t>
             </a:r>
             <a:r>
-              <a:rPr lang="en-US" altLang="zh-TW" b="1" dirty="0" err="1"/>
+              <a:rPr lang="en-US" altLang="zh-TW" b="1" dirty="0" err="1">
+                <a:latin typeface="標楷體" panose="03000509000000000000" pitchFamily="65" charset="-120"/>
+              </a:rPr>
               <a:t>Skymask</a:t>
             </a:r>
             <a:r>
-              <a:rPr lang="zh-TW" altLang="en-US" b="1" dirty="0"/>
+              <a:rPr lang="zh-TW" altLang="en-US" b="1" dirty="0">
+                <a:latin typeface="標楷體" panose="03000509000000000000" pitchFamily="65" charset="-120"/>
+              </a:rPr>
               <a:t>生成</a:t>
             </a:r>
             <a:r>
-              <a:rPr lang="en-US" altLang="zh-TW" b="1" dirty="0"/>
+              <a:rPr lang="en-US" altLang="zh-TW" b="1" dirty="0">
+                <a:latin typeface="標楷體" panose="03000509000000000000" pitchFamily="65" charset="-120"/>
+              </a:rPr>
               <a:t>)</a:t>
             </a:r>
             <a:r>
-              <a:rPr lang="zh-TW" altLang="en-US" dirty="0"/>
+              <a:rPr lang="zh-TW" altLang="en-US" dirty="0">
+                <a:latin typeface="標楷體" panose="03000509000000000000" pitchFamily="65" charset="-120"/>
+              </a:rPr>
               <a:t>：</a:t>
             </a:r>
-            <a:endParaRPr lang="en-US" altLang="zh-TW" dirty="0"/>
+            <a:endParaRPr lang="en-US" altLang="zh-TW" dirty="0">
+              <a:latin typeface="標楷體" panose="03000509000000000000" pitchFamily="65" charset="-120"/>
+            </a:endParaRPr>
           </a:p>
           <a:p>
             <a:pPr marL="742950" lvl="1" indent="-285750">
@@ -16382,26 +17452,62 @@
               <a:buChar char="l"/>
             </a:pPr>
             <a:r>
-              <a:rPr lang="zh-TW" altLang="en-US" dirty="0"/>
+              <a:rPr lang="zh-TW" altLang="en-US" dirty="0">
+                <a:latin typeface="標楷體" panose="03000509000000000000" pitchFamily="65" charset="-120"/>
+              </a:rPr>
               <a:t>事先利用</a:t>
             </a:r>
             <a:r>
-              <a:rPr lang="en-US" altLang="zh-TW" dirty="0"/>
+              <a:rPr lang="en-US" altLang="zh-TW" dirty="0">
+                <a:latin typeface="標楷體" panose="03000509000000000000" pitchFamily="65" charset="-120"/>
+              </a:rPr>
               <a:t>3D</a:t>
             </a:r>
             <a:r>
-              <a:rPr lang="zh-TW" altLang="en-US" dirty="0"/>
+              <a:rPr lang="zh-TW" altLang="en-US" dirty="0">
+                <a:latin typeface="標楷體" panose="03000509000000000000" pitchFamily="65" charset="-120"/>
+              </a:rPr>
               <a:t>建築模型產生「</a:t>
             </a:r>
             <a:r>
-              <a:rPr lang="en-US" altLang="zh-TW" dirty="0" err="1"/>
+              <a:rPr lang="en-US" altLang="zh-TW" dirty="0" err="1">
+                <a:latin typeface="標楷體" panose="03000509000000000000" pitchFamily="65" charset="-120"/>
+              </a:rPr>
               <a:t>Skymask</a:t>
             </a:r>
             <a:r>
-              <a:rPr lang="zh-TW" altLang="en-US" dirty="0"/>
-              <a:t>」（天際線遮罩），這是一種呈現建築物邊界最高仰角的星空圖</a:t>
-            </a:r>
-            <a:endParaRPr lang="en-US" altLang="zh-TW" dirty="0"/>
+              <a:rPr lang="zh-TW" altLang="en-US" dirty="0">
+                <a:latin typeface="標楷體" panose="03000509000000000000" pitchFamily="65" charset="-120"/>
+              </a:rPr>
+              <a:t>」</a:t>
+            </a:r>
+            <a:r>
+              <a:rPr lang="en-US" altLang="zh-TW" dirty="0">
+                <a:latin typeface="標楷體" panose="03000509000000000000" pitchFamily="65" charset="-120"/>
+              </a:rPr>
+              <a:t>(</a:t>
+            </a:r>
+            <a:r>
+              <a:rPr lang="zh-TW" altLang="en-US" dirty="0">
+                <a:latin typeface="標楷體" panose="03000509000000000000" pitchFamily="65" charset="-120"/>
+              </a:rPr>
+              <a:t>天際線遮罩</a:t>
+            </a:r>
+            <a:r>
+              <a:rPr lang="en-US" altLang="zh-TW" dirty="0">
+                <a:latin typeface="標楷體" panose="03000509000000000000" pitchFamily="65" charset="-120"/>
+              </a:rPr>
+              <a:t>)</a:t>
+            </a:r>
+            <a:r>
+              <a:rPr lang="zh-TW" altLang="en-US" dirty="0">
+                <a:latin typeface="標楷體" panose="03000509000000000000" pitchFamily="65" charset="-120"/>
+              </a:rPr>
+              <a:t>，這是一種呈現建築物邊界最高仰角的星空圖</a:t>
+            </a:r>
+            <a:endParaRPr lang="en-US" altLang="zh-TW" dirty="0">
+              <a:latin typeface="標楷體" panose="03000509000000000000" pitchFamily="65" charset="-120"/>
+            </a:endParaRPr>
           </a:p>
           <a:p>
             <a:pPr marL="742950" lvl="1" indent="-285750">
@@ -16409,34 +17515,41 @@
               <a:buChar char="l"/>
             </a:pPr>
             <a:r>
-              <a:rPr lang="zh-TW" altLang="en-US" dirty="0"/>
+              <a:rPr lang="zh-TW" altLang="en-US" dirty="0">
+                <a:latin typeface="標楷體" panose="03000509000000000000" pitchFamily="65" charset="-120"/>
+              </a:rPr>
               <a:t>透過預先計算並儲存在伺服器中，</a:t>
             </a:r>
             <a:r>
-              <a:rPr lang="en-US" altLang="zh-TW" dirty="0" err="1"/>
+              <a:rPr lang="en-US" altLang="zh-TW" dirty="0" err="1">
+                <a:latin typeface="標楷體" panose="03000509000000000000" pitchFamily="65" charset="-120"/>
+              </a:rPr>
               <a:t>Skymask</a:t>
             </a:r>
             <a:r>
-              <a:rPr lang="zh-TW" altLang="en-US" dirty="0"/>
-              <a:t>可在定位時用來快速判斷衛星訊號是屬於視距（</a:t>
-            </a:r>
-            <a:r>
-              <a:rPr lang="en-US" altLang="zh-TW" dirty="0"/>
-              <a:t>LOS</a:t>
-            </a:r>
-            <a:r>
-              <a:rPr lang="zh-TW" altLang="en-US" dirty="0"/>
-              <a:t>）還是非視距（</a:t>
-            </a:r>
-            <a:r>
-              <a:rPr lang="en-US" altLang="zh-TW" dirty="0"/>
-              <a:t>NLOS</a:t>
-            </a:r>
-            <a:r>
-              <a:rPr lang="zh-TW" altLang="en-US" dirty="0"/>
-              <a:t>）</a:t>
-            </a:r>
-            <a:endParaRPr lang="en-US" altLang="zh-TW" dirty="0"/>
+              <a:rPr lang="zh-TW" altLang="en-US" dirty="0">
+                <a:latin typeface="標楷體" panose="03000509000000000000" pitchFamily="65" charset="-120"/>
+              </a:rPr>
+              <a:t>可在定位時用來快速判斷衛星訊號是屬於視距</a:t>
+            </a:r>
+            <a:r>
+              <a:rPr lang="en-US" altLang="zh-TW" dirty="0">
+                <a:latin typeface="標楷體" panose="03000509000000000000" pitchFamily="65" charset="-120"/>
+              </a:rPr>
+              <a:t>(LOS)</a:t>
+            </a:r>
+            <a:r>
+              <a:rPr lang="zh-TW" altLang="en-US" dirty="0">
+                <a:latin typeface="標楷體" panose="03000509000000000000" pitchFamily="65" charset="-120"/>
+              </a:rPr>
+              <a:t>還是非視距</a:t>
+            </a:r>
+            <a:r>
+              <a:rPr lang="en-US" altLang="zh-TW" dirty="0">
+                <a:latin typeface="標楷體" panose="03000509000000000000" pitchFamily="65" charset="-120"/>
+              </a:rPr>
+              <a:t>(NLOS)</a:t>
+            </a:r>
           </a:p>
           <a:p>
             <a:pPr marL="742950" lvl="1" indent="-285750">
@@ -16453,19 +17566,27 @@
               <a:buChar char="n"/>
             </a:pPr>
             <a:r>
-              <a:rPr lang="zh-TW" altLang="en-US" b="1" dirty="0"/>
+              <a:rPr lang="zh-TW" altLang="en-US" b="1" dirty="0">
+                <a:latin typeface="標楷體" panose="03000509000000000000" pitchFamily="65" charset="-120"/>
+              </a:rPr>
               <a:t>線上階段</a:t>
             </a:r>
             <a:r>
-              <a:rPr lang="en-US" altLang="zh-TW" b="1" dirty="0"/>
+              <a:rPr lang="en-US" altLang="zh-TW" b="1" dirty="0">
+                <a:latin typeface="標楷體" panose="03000509000000000000" pitchFamily="65" charset="-120"/>
+              </a:rPr>
               <a:t>(</a:t>
             </a:r>
             <a:r>
-              <a:rPr lang="zh-TW" altLang="en-US" b="1" dirty="0"/>
+              <a:rPr lang="zh-TW" altLang="en-US" b="1" dirty="0">
+                <a:latin typeface="標楷體" panose="03000509000000000000" pitchFamily="65" charset="-120"/>
+              </a:rPr>
               <a:t>即時定位與位置假設評分</a:t>
             </a:r>
             <a:r>
-              <a:rPr lang="en-US" altLang="zh-TW" b="1" dirty="0"/>
+              <a:rPr lang="en-US" altLang="zh-TW" b="1" dirty="0">
+                <a:latin typeface="標楷體" panose="03000509000000000000" pitchFamily="65" charset="-120"/>
+              </a:rPr>
               <a:t>)</a:t>
             </a:r>
           </a:p>
@@ -16475,30 +17596,62 @@
               <a:buChar char="l"/>
             </a:pPr>
             <a:r>
-              <a:rPr lang="zh-TW" altLang="en-US" b="1" dirty="0"/>
-              <a:t>步驟一（常規</a:t>
-            </a:r>
-            <a:r>
-              <a:rPr lang="en-US" altLang="zh-TW" b="1" dirty="0"/>
+              <a:rPr lang="zh-TW" altLang="en-US" b="1" dirty="0">
+                <a:latin typeface="標楷體" panose="03000509000000000000" pitchFamily="65" charset="-120"/>
+              </a:rPr>
+              <a:t>步驟一</a:t>
+            </a:r>
+            <a:r>
+              <a:rPr lang="en-US" altLang="zh-TW" b="1" dirty="0">
+                <a:latin typeface="標楷體" panose="03000509000000000000" pitchFamily="65" charset="-120"/>
+              </a:rPr>
+              <a:t>(</a:t>
+            </a:r>
+            <a:r>
+              <a:rPr lang="zh-TW" altLang="en-US" b="1" dirty="0">
+                <a:latin typeface="標楷體" panose="03000509000000000000" pitchFamily="65" charset="-120"/>
+              </a:rPr>
+              <a:t>常規</a:t>
+            </a:r>
+            <a:r>
+              <a:rPr lang="en-US" altLang="zh-TW" b="1" dirty="0">
+                <a:latin typeface="標楷體" panose="03000509000000000000" pitchFamily="65" charset="-120"/>
+              </a:rPr>
               <a:t>RTK</a:t>
             </a:r>
             <a:r>
-              <a:rPr lang="zh-TW" altLang="en-US" b="1" dirty="0"/>
-              <a:t>初步估算）</a:t>
-            </a:r>
-            <a:r>
-              <a:rPr lang="zh-TW" altLang="en-US" dirty="0"/>
-              <a:t>：先利用傳統的雙差分（</a:t>
-            </a:r>
-            <a:r>
-              <a:rPr lang="en-US" altLang="zh-TW" dirty="0"/>
-              <a:t>Double-difference</a:t>
-            </a:r>
-            <a:r>
-              <a:rPr lang="zh-TW" altLang="en-US" dirty="0"/>
-              <a:t>）量測與最小平方法，計算出接收器的初始浮點解與模糊度</a:t>
-            </a:r>
-            <a:endParaRPr lang="en-US" altLang="zh-TW" dirty="0"/>
+              <a:rPr lang="zh-TW" altLang="en-US" b="1" dirty="0">
+                <a:latin typeface="標楷體" panose="03000509000000000000" pitchFamily="65" charset="-120"/>
+              </a:rPr>
+              <a:t>初步估算</a:t>
+            </a:r>
+            <a:r>
+              <a:rPr lang="en-US" altLang="zh-TW" b="1" dirty="0">
+                <a:latin typeface="標楷體" panose="03000509000000000000" pitchFamily="65" charset="-120"/>
+              </a:rPr>
+              <a:t>)</a:t>
+            </a:r>
+            <a:r>
+              <a:rPr lang="zh-TW" altLang="en-US" dirty="0">
+                <a:latin typeface="標楷體" panose="03000509000000000000" pitchFamily="65" charset="-120"/>
+              </a:rPr>
+              <a:t>：先利用傳統的雙差分</a:t>
+            </a:r>
+            <a:r>
+              <a:rPr lang="en-US" altLang="zh-TW" dirty="0">
+                <a:latin typeface="標楷體" panose="03000509000000000000" pitchFamily="65" charset="-120"/>
+              </a:rPr>
+              <a:t>(Double-difference)</a:t>
+            </a:r>
+            <a:r>
+              <a:rPr lang="zh-TW" altLang="en-US" dirty="0">
+                <a:latin typeface="標楷體" panose="03000509000000000000" pitchFamily="65" charset="-120"/>
+              </a:rPr>
+              <a:t>量測與最小平方法，計算出接收器的初始浮點解與模糊度</a:t>
+            </a:r>
+            <a:endParaRPr lang="en-US" altLang="zh-TW" dirty="0">
+              <a:latin typeface="標楷體" panose="03000509000000000000" pitchFamily="65" charset="-120"/>
+            </a:endParaRPr>
           </a:p>
           <a:p>
             <a:pPr marL="742950" lvl="1" indent="-285750">
@@ -16506,78 +17659,134 @@
               <a:buChar char="l"/>
             </a:pPr>
             <a:r>
-              <a:rPr lang="zh-TW" altLang="en-US" b="1" dirty="0"/>
-              <a:t>步驟二（候選點分佈與評分）</a:t>
-            </a:r>
-            <a:r>
-              <a:rPr lang="zh-TW" altLang="en-US" dirty="0"/>
+              <a:rPr lang="zh-TW" altLang="en-US" b="1" dirty="0">
+                <a:latin typeface="標楷體" panose="03000509000000000000" pitchFamily="65" charset="-120"/>
+              </a:rPr>
+              <a:t>步驟二</a:t>
+            </a:r>
+            <a:r>
+              <a:rPr lang="en-US" altLang="zh-TW" b="1" dirty="0">
+                <a:latin typeface="標楷體" panose="03000509000000000000" pitchFamily="65" charset="-120"/>
+              </a:rPr>
+              <a:t>(</a:t>
+            </a:r>
+            <a:r>
+              <a:rPr lang="zh-TW" altLang="en-US" b="1" dirty="0">
+                <a:latin typeface="標楷體" panose="03000509000000000000" pitchFamily="65" charset="-120"/>
+              </a:rPr>
+              <a:t>候選點分佈與評分</a:t>
+            </a:r>
+            <a:r>
+              <a:rPr lang="en-US" altLang="zh-TW" b="1" dirty="0">
+                <a:latin typeface="標楷體" panose="03000509000000000000" pitchFamily="65" charset="-120"/>
+              </a:rPr>
+              <a:t>)</a:t>
+            </a:r>
+            <a:r>
+              <a:rPr lang="zh-TW" altLang="en-US" dirty="0">
+                <a:latin typeface="標楷體" panose="03000509000000000000" pitchFamily="65" charset="-120"/>
+              </a:rPr>
               <a:t>：在初始位置周圍以</a:t>
             </a:r>
             <a:r>
-              <a:rPr lang="en-US" altLang="zh-TW" dirty="0"/>
+              <a:rPr lang="en-US" altLang="zh-TW" dirty="0">
+                <a:latin typeface="標楷體" panose="03000509000000000000" pitchFamily="65" charset="-120"/>
+              </a:rPr>
               <a:t>5</a:t>
             </a:r>
             <a:r>
-              <a:rPr lang="zh-TW" altLang="en-US" dirty="0"/>
+              <a:rPr lang="zh-TW" altLang="en-US" dirty="0">
+                <a:latin typeface="標楷體" panose="03000509000000000000" pitchFamily="65" charset="-120"/>
+              </a:rPr>
               <a:t>公尺半徑、</a:t>
             </a:r>
             <a:r>
-              <a:rPr lang="en-US" altLang="zh-TW" dirty="0"/>
+              <a:rPr lang="en-US" altLang="zh-TW" dirty="0">
+                <a:latin typeface="標楷體" panose="03000509000000000000" pitchFamily="65" charset="-120"/>
+              </a:rPr>
               <a:t>50</a:t>
             </a:r>
             <a:r>
-              <a:rPr lang="zh-TW" altLang="en-US" dirty="0"/>
+              <a:rPr lang="zh-TW" altLang="en-US" dirty="0">
+                <a:latin typeface="標楷體" panose="03000509000000000000" pitchFamily="65" charset="-120"/>
+              </a:rPr>
               <a:t>公分解析度分佈多個「位置假設候選點」在每個候選點上，利用</a:t>
             </a:r>
             <a:r>
-              <a:rPr lang="en-US" altLang="zh-TW" dirty="0" err="1"/>
+              <a:rPr lang="en-US" altLang="zh-TW" dirty="0" err="1">
+                <a:latin typeface="標楷體" panose="03000509000000000000" pitchFamily="65" charset="-120"/>
+              </a:rPr>
               <a:t>Skymask</a:t>
             </a:r>
             <a:r>
-              <a:rPr lang="zh-TW" altLang="en-US" dirty="0"/>
+              <a:rPr lang="zh-TW" altLang="en-US" dirty="0">
+                <a:latin typeface="標楷體" panose="03000509000000000000" pitchFamily="65" charset="-120"/>
+              </a:rPr>
               <a:t>排除</a:t>
             </a:r>
             <a:r>
-              <a:rPr lang="en-US" altLang="zh-TW" dirty="0"/>
+              <a:rPr lang="en-US" altLang="zh-TW" dirty="0">
+                <a:latin typeface="標楷體" panose="03000509000000000000" pitchFamily="65" charset="-120"/>
+              </a:rPr>
               <a:t>NLOS</a:t>
             </a:r>
             <a:r>
-              <a:rPr lang="zh-TW" altLang="en-US" dirty="0"/>
+              <a:rPr lang="zh-TW" altLang="en-US" dirty="0">
+                <a:latin typeface="標楷體" panose="03000509000000000000" pitchFamily="65" charset="-120"/>
+              </a:rPr>
               <a:t>衛星，並採用</a:t>
             </a:r>
             <a:r>
-              <a:rPr lang="zh-TW" altLang="en-US" b="1" dirty="0"/>
-              <a:t>最佳整數等變量（</a:t>
-            </a:r>
-            <a:r>
-              <a:rPr lang="en-US" altLang="zh-TW" b="1" dirty="0"/>
-              <a:t>BIE</a:t>
-            </a:r>
-            <a:r>
-              <a:rPr lang="zh-TW" altLang="en-US" b="1" dirty="0"/>
-              <a:t>）估計器</a:t>
-            </a:r>
-            <a:r>
-              <a:rPr lang="zh-TW" altLang="en-US" dirty="0"/>
-              <a:t>來進行模糊度解算（</a:t>
-            </a:r>
-            <a:r>
-              <a:rPr lang="en-US" altLang="zh-TW" dirty="0"/>
-              <a:t>AR</a:t>
-            </a:r>
-            <a:r>
-              <a:rPr lang="zh-TW" altLang="en-US" dirty="0"/>
-              <a:t>）隨後，比對解算後的模型載波相位與實際測量值，利用均方誤差（</a:t>
-            </a:r>
-            <a:r>
-              <a:rPr lang="en-US" altLang="zh-TW" dirty="0"/>
-              <a:t>MSE</a:t>
-            </a:r>
-            <a:r>
-              <a:rPr lang="zh-TW" altLang="en-US" dirty="0"/>
-              <a:t>）為各候選點進行評分，誤差越小得分越高</a:t>
-            </a:r>
-            <a:endParaRPr lang="en-US" altLang="zh-TW" dirty="0"/>
+              <a:rPr lang="zh-TW" altLang="en-US" b="1" dirty="0">
+                <a:latin typeface="標楷體" panose="03000509000000000000" pitchFamily="65" charset="-120"/>
+              </a:rPr>
+              <a:t>最佳整數等變量</a:t>
+            </a:r>
+            <a:r>
+              <a:rPr lang="en-US" altLang="zh-TW" b="1" dirty="0">
+                <a:latin typeface="標楷體" panose="03000509000000000000" pitchFamily="65" charset="-120"/>
+              </a:rPr>
+              <a:t>(BIE)</a:t>
+            </a:r>
+            <a:r>
+              <a:rPr lang="zh-TW" altLang="en-US" b="1" dirty="0">
+                <a:latin typeface="標楷體" panose="03000509000000000000" pitchFamily="65" charset="-120"/>
+              </a:rPr>
+              <a:t>估計器</a:t>
+            </a:r>
+            <a:r>
+              <a:rPr lang="zh-TW" altLang="en-US" dirty="0">
+                <a:latin typeface="標楷體" panose="03000509000000000000" pitchFamily="65" charset="-120"/>
+              </a:rPr>
+              <a:t>來進行模糊度解算</a:t>
+            </a:r>
+            <a:r>
+              <a:rPr lang="en-US" altLang="zh-TW" dirty="0">
+                <a:latin typeface="標楷體" panose="03000509000000000000" pitchFamily="65" charset="-120"/>
+              </a:rPr>
+              <a:t>(AR)</a:t>
+            </a:r>
+            <a:r>
+              <a:rPr lang="zh-TW" altLang="en-US" dirty="0">
+                <a:latin typeface="標楷體" panose="03000509000000000000" pitchFamily="65" charset="-120"/>
+              </a:rPr>
+              <a:t>隨後，比對解算後的模型載波相位與實際測量值，利用均方誤差</a:t>
+            </a:r>
+            <a:r>
+              <a:rPr lang="en-US" altLang="zh-TW" dirty="0">
+                <a:latin typeface="標楷體" panose="03000509000000000000" pitchFamily="65" charset="-120"/>
+              </a:rPr>
+              <a:t>(MSE)</a:t>
+            </a:r>
+            <a:r>
+              <a:rPr lang="zh-TW" altLang="en-US" dirty="0">
+                <a:latin typeface="標楷體" panose="03000509000000000000" pitchFamily="65" charset="-120"/>
+              </a:rPr>
+              <a:t>為各候選點進行評分，誤差越小得分越高</a:t>
+            </a:r>
+            <a:endParaRPr lang="en-US" altLang="zh-TW" dirty="0">
+              <a:latin typeface="標楷體" panose="03000509000000000000" pitchFamily="65" charset="-120"/>
+            </a:endParaRPr>
           </a:p>
           <a:p>
             <a:pPr marL="742950" lvl="1" indent="-285750">
@@ -16585,27 +17794,57 @@
               <a:buChar char="l"/>
             </a:pPr>
             <a:r>
-              <a:rPr lang="zh-TW" altLang="en-US" b="1" dirty="0"/>
-              <a:t>步驟三（最終定位求解）</a:t>
-            </a:r>
-            <a:r>
-              <a:rPr lang="zh-TW" altLang="en-US" dirty="0"/>
+              <a:rPr lang="zh-TW" altLang="en-US" b="1" dirty="0">
+                <a:latin typeface="標楷體" panose="03000509000000000000" pitchFamily="65" charset="-120"/>
+              </a:rPr>
+              <a:t>步驟三</a:t>
+            </a:r>
+            <a:r>
+              <a:rPr lang="en-US" altLang="zh-TW" b="1" dirty="0">
+                <a:latin typeface="標楷體" panose="03000509000000000000" pitchFamily="65" charset="-120"/>
+              </a:rPr>
+              <a:t>(</a:t>
+            </a:r>
+            <a:r>
+              <a:rPr lang="zh-TW" altLang="en-US" b="1" dirty="0">
+                <a:latin typeface="標楷體" panose="03000509000000000000" pitchFamily="65" charset="-120"/>
+              </a:rPr>
+              <a:t>最終定位求解</a:t>
+            </a:r>
+            <a:r>
+              <a:rPr lang="en-US" altLang="zh-TW" b="1" dirty="0">
+                <a:latin typeface="標楷體" panose="03000509000000000000" pitchFamily="65" charset="-120"/>
+              </a:rPr>
+              <a:t>)</a:t>
+            </a:r>
+            <a:r>
+              <a:rPr lang="zh-TW" altLang="en-US" dirty="0">
+                <a:latin typeface="標楷體" panose="03000509000000000000" pitchFamily="65" charset="-120"/>
+              </a:rPr>
               <a:t>：根據所有候選點的評分進行加權平均，求得一個「準確的浮點位置」接著，以此位置的能見度再次執行衛星篩選與</a:t>
             </a:r>
             <a:r>
-              <a:rPr lang="en-US" altLang="zh-TW" dirty="0"/>
+              <a:rPr lang="en-US" altLang="zh-TW" dirty="0">
+                <a:latin typeface="標楷體" panose="03000509000000000000" pitchFamily="65" charset="-120"/>
+              </a:rPr>
               <a:t>BIE</a:t>
             </a:r>
             <a:r>
-              <a:rPr lang="zh-TW" altLang="en-US" dirty="0"/>
+              <a:rPr lang="zh-TW" altLang="en-US" dirty="0">
+                <a:latin typeface="標楷體" panose="03000509000000000000" pitchFamily="65" charset="-120"/>
+              </a:rPr>
               <a:t>模糊度解算，輸出最終的高精度</a:t>
             </a:r>
             <a:r>
-              <a:rPr lang="en-US" altLang="zh-TW" dirty="0"/>
+              <a:rPr lang="en-US" altLang="zh-TW" dirty="0">
+                <a:latin typeface="標楷體" panose="03000509000000000000" pitchFamily="65" charset="-120"/>
+              </a:rPr>
               <a:t>3DMAGNSSRTK</a:t>
             </a:r>
             <a:r>
-              <a:rPr lang="zh-TW" altLang="en-US" dirty="0"/>
+              <a:rPr lang="zh-TW" altLang="en-US" dirty="0">
+                <a:latin typeface="標楷體" panose="03000509000000000000" pitchFamily="65" charset="-120"/>
+              </a:rPr>
               <a:t>定位結果</a:t>
             </a:r>
             <a:endParaRPr lang="en-US" altLang="zh-TW" dirty="0">
@@ -16678,7 +17917,7 @@
           <a:p>
             <a:r>
               <a:rPr lang="zh-TW" altLang="en-US" dirty="0"/>
-              <a:t>實驗設計與結果分析</a:t>
+              <a:t>結果分析</a:t>
             </a:r>
           </a:p>
         </p:txBody>
@@ -16742,11 +17981,7 @@
           <a:p>
             <a:r>
               <a:rPr lang="zh-TW" altLang="en-US" dirty="0"/>
-              <a:t>實驗設計</a:t>
-            </a:r>
-            <a:r>
-              <a:rPr lang="zh-TW" altLang="en-US" b="0" dirty="0"/>
-              <a:t> </a:t>
+              <a:t>結果分析</a:t>
             </a:r>
             <a:r>
               <a:rPr lang="zh-TW" altLang="en-US" sz="1800" dirty="0"/>
@@ -16789,95 +18024,153 @@
               <a:buChar char="n"/>
             </a:pPr>
             <a:r>
-              <a:rPr lang="zh-TW" altLang="en-US" b="1" dirty="0"/>
+              <a:rPr lang="zh-TW" altLang="en-US" b="1" dirty="0">
+                <a:latin typeface="標楷體" panose="03000509000000000000" pitchFamily="65" charset="-120"/>
+              </a:rPr>
               <a:t>關鍵指標分析 </a:t>
             </a:r>
             <a:r>
-              <a:rPr lang="en-US" altLang="zh-TW" b="1" dirty="0"/>
+              <a:rPr lang="en-US" altLang="zh-TW" b="1" dirty="0">
+                <a:latin typeface="標楷體" panose="03000509000000000000" pitchFamily="65" charset="-120"/>
+              </a:rPr>
               <a:t>(ADOP </a:t>
             </a:r>
             <a:r>
-              <a:rPr lang="zh-TW" altLang="en-US" b="1" dirty="0"/>
+              <a:rPr lang="zh-TW" altLang="en-US" b="1" dirty="0">
+                <a:latin typeface="標楷體" panose="03000509000000000000" pitchFamily="65" charset="-120"/>
+              </a:rPr>
               <a:t>與 </a:t>
             </a:r>
             <a:r>
-              <a:rPr lang="en-US" altLang="zh-TW" b="1" dirty="0"/>
+              <a:rPr lang="en-US" altLang="zh-TW" b="1" dirty="0">
+                <a:latin typeface="標楷體" panose="03000509000000000000" pitchFamily="65" charset="-120"/>
+              </a:rPr>
               <a:t>PDOP)</a:t>
             </a:r>
             <a:r>
-              <a:rPr lang="zh-TW" altLang="en-US" dirty="0"/>
+              <a:rPr lang="zh-TW" altLang="en-US" dirty="0">
+                <a:latin typeface="標楷體" panose="03000509000000000000" pitchFamily="65" charset="-120"/>
+              </a:rPr>
               <a:t>：結果顯示，在導入 </a:t>
             </a:r>
             <a:r>
-              <a:rPr lang="en-US" altLang="zh-TW" dirty="0"/>
+              <a:rPr lang="en-US" altLang="zh-TW" dirty="0">
+                <a:latin typeface="標楷體" panose="03000509000000000000" pitchFamily="65" charset="-120"/>
+              </a:rPr>
               <a:t>3DMA </a:t>
             </a:r>
             <a:r>
-              <a:rPr lang="zh-TW" altLang="en-US" dirty="0"/>
+              <a:rPr lang="zh-TW" altLang="en-US" dirty="0">
+                <a:latin typeface="標楷體" panose="03000509000000000000" pitchFamily="65" charset="-120"/>
+              </a:rPr>
               <a:t>排除不健康的 </a:t>
             </a:r>
             <a:r>
-              <a:rPr lang="en-US" altLang="zh-TW" dirty="0"/>
+              <a:rPr lang="en-US" altLang="zh-TW" dirty="0">
+                <a:latin typeface="標楷體" panose="03000509000000000000" pitchFamily="65" charset="-120"/>
+              </a:rPr>
               <a:t>NLOS </a:t>
             </a:r>
             <a:r>
-              <a:rPr lang="zh-TW" altLang="en-US" dirty="0"/>
-              <a:t>衛星後，儘管位置精度衰減因子（</a:t>
-            </a:r>
-            <a:r>
-              <a:rPr lang="en-US" altLang="zh-TW" dirty="0"/>
-              <a:t>PDOP</a:t>
-            </a:r>
-            <a:r>
-              <a:rPr lang="zh-TW" altLang="en-US" dirty="0"/>
-              <a:t>）會略微增加，但</a:t>
-            </a:r>
-            <a:r>
-              <a:rPr lang="zh-TW" altLang="en-US" b="1" dirty="0"/>
-              <a:t>模糊度精度衰減因子（</a:t>
-            </a:r>
-            <a:r>
-              <a:rPr lang="en-US" altLang="zh-TW" b="1" dirty="0"/>
-              <a:t>ADOP</a:t>
-            </a:r>
-            <a:r>
-              <a:rPr lang="zh-TW" altLang="en-US" b="1" dirty="0"/>
-              <a:t>）卻顯著下降（從大於 </a:t>
-            </a:r>
-            <a:r>
-              <a:rPr lang="en-US" altLang="zh-TW" b="1" dirty="0"/>
+              <a:rPr lang="zh-TW" altLang="en-US" dirty="0">
+                <a:latin typeface="標楷體" panose="03000509000000000000" pitchFamily="65" charset="-120"/>
+              </a:rPr>
+              <a:t>衛星後，儘管位置精度衰減因子</a:t>
+            </a:r>
+            <a:r>
+              <a:rPr lang="en-US" altLang="zh-TW" dirty="0">
+                <a:latin typeface="標楷體" panose="03000509000000000000" pitchFamily="65" charset="-120"/>
+              </a:rPr>
+              <a:t>(PDOP)</a:t>
+            </a:r>
+            <a:r>
+              <a:rPr lang="zh-TW" altLang="en-US" dirty="0">
+                <a:latin typeface="標楷體" panose="03000509000000000000" pitchFamily="65" charset="-120"/>
+              </a:rPr>
+              <a:t>會略微增加，但</a:t>
+            </a:r>
+            <a:r>
+              <a:rPr lang="zh-TW" altLang="en-US" b="1" dirty="0">
+                <a:latin typeface="標楷體" panose="03000509000000000000" pitchFamily="65" charset="-120"/>
+              </a:rPr>
+              <a:t>模糊度精度衰減因子</a:t>
+            </a:r>
+            <a:r>
+              <a:rPr lang="en-US" altLang="zh-TW" b="1" dirty="0">
+                <a:latin typeface="標楷體" panose="03000509000000000000" pitchFamily="65" charset="-120"/>
+              </a:rPr>
+              <a:t>(ADOP)</a:t>
+            </a:r>
+            <a:r>
+              <a:rPr lang="zh-TW" altLang="en-US" b="1" dirty="0">
+                <a:latin typeface="標楷體" panose="03000509000000000000" pitchFamily="65" charset="-120"/>
+              </a:rPr>
+              <a:t>卻顯著下降</a:t>
+            </a:r>
+            <a:r>
+              <a:rPr lang="en-US" altLang="zh-TW" b="1" dirty="0">
+                <a:latin typeface="標楷體" panose="03000509000000000000" pitchFamily="65" charset="-120"/>
+              </a:rPr>
+              <a:t>(</a:t>
+            </a:r>
+            <a:r>
+              <a:rPr lang="zh-TW" altLang="en-US" b="1" dirty="0">
+                <a:latin typeface="標楷體" panose="03000509000000000000" pitchFamily="65" charset="-120"/>
+              </a:rPr>
+              <a:t>從大於 </a:t>
+            </a:r>
+            <a:r>
+              <a:rPr lang="en-US" altLang="zh-TW" b="1" dirty="0">
+                <a:latin typeface="標楷體" panose="03000509000000000000" pitchFamily="65" charset="-120"/>
+              </a:rPr>
               <a:t>1 </a:t>
             </a:r>
             <a:r>
-              <a:rPr lang="zh-TW" altLang="en-US" b="1" dirty="0"/>
+              <a:rPr lang="zh-TW" altLang="en-US" b="1" dirty="0">
+                <a:latin typeface="標楷體" panose="03000509000000000000" pitchFamily="65" charset="-120"/>
+              </a:rPr>
               <a:t>週期降至 </a:t>
             </a:r>
             <a:r>
-              <a:rPr lang="en-US" altLang="zh-TW" b="1" dirty="0"/>
+              <a:rPr lang="en-US" altLang="zh-TW" b="1" dirty="0">
+                <a:latin typeface="標楷體" panose="03000509000000000000" pitchFamily="65" charset="-120"/>
+              </a:rPr>
               <a:t>0.2 </a:t>
             </a:r>
             <a:r>
-              <a:rPr lang="zh-TW" altLang="en-US" b="1" dirty="0"/>
+              <a:rPr lang="zh-TW" altLang="en-US" b="1" dirty="0">
+                <a:latin typeface="標楷體" panose="03000509000000000000" pitchFamily="65" charset="-120"/>
+              </a:rPr>
               <a:t>週期以內</a:t>
             </a:r>
             <a:r>
-              <a:rPr lang="zh-TW" altLang="en-US" dirty="0"/>
+              <a:rPr lang="zh-TW" altLang="en-US" dirty="0">
+                <a:latin typeface="標楷體" panose="03000509000000000000" pitchFamily="65" charset="-120"/>
+              </a:rPr>
               <a:t>較低的 </a:t>
             </a:r>
             <a:r>
-              <a:rPr lang="en-US" altLang="zh-TW" dirty="0"/>
+              <a:rPr lang="en-US" altLang="zh-TW" dirty="0">
+                <a:latin typeface="標楷體" panose="03000509000000000000" pitchFamily="65" charset="-120"/>
+              </a:rPr>
               <a:t>ADOP </a:t>
             </a:r>
             <a:r>
-              <a:rPr lang="zh-TW" altLang="en-US" dirty="0"/>
+              <a:rPr lang="zh-TW" altLang="en-US" dirty="0">
+                <a:latin typeface="標楷體" panose="03000509000000000000" pitchFamily="65" charset="-120"/>
+              </a:rPr>
               <a:t>代表模糊度估計的精確性大幅提高，有助於解算出正確的 </a:t>
             </a:r>
             <a:r>
-              <a:rPr lang="en-US" altLang="zh-TW" dirty="0"/>
+              <a:rPr lang="en-US" altLang="zh-TW" dirty="0">
+                <a:latin typeface="標楷體" panose="03000509000000000000" pitchFamily="65" charset="-120"/>
+              </a:rPr>
               <a:t>RTK </a:t>
             </a:r>
             <a:r>
-              <a:rPr lang="zh-TW" altLang="en-US" dirty="0"/>
+              <a:rPr lang="zh-TW" altLang="en-US" dirty="0">
+                <a:latin typeface="標楷體" panose="03000509000000000000" pitchFamily="65" charset="-120"/>
+              </a:rPr>
               <a:t>定位</a:t>
             </a:r>
           </a:p>
@@ -16896,14 +18189,20 @@
               <a:buChar char="n"/>
             </a:pPr>
             <a:r>
-              <a:rPr lang="zh-TW" altLang="en-US" b="1" dirty="0"/>
+              <a:rPr lang="zh-TW" altLang="en-US" b="1" dirty="0">
+                <a:latin typeface="標楷體" panose="03000509000000000000" pitchFamily="65" charset="-120"/>
+              </a:rPr>
               <a:t>定位誤差表現</a:t>
             </a:r>
             <a:r>
-              <a:rPr lang="zh-TW" altLang="en-US" dirty="0"/>
+              <a:rPr lang="zh-TW" altLang="en-US" dirty="0">
+                <a:latin typeface="標楷體" panose="03000509000000000000" pitchFamily="65" charset="-120"/>
+              </a:rPr>
               <a:t>：</a:t>
             </a:r>
-            <a:endParaRPr lang="en-US" altLang="zh-TW" dirty="0"/>
+            <a:endParaRPr lang="en-US" altLang="zh-TW" dirty="0">
+              <a:latin typeface="標楷體" panose="03000509000000000000" pitchFamily="65" charset="-120"/>
+            </a:endParaRPr>
           </a:p>
           <a:p>
             <a:pPr marL="742950" lvl="1" indent="-285750">
@@ -16911,38 +18210,47 @@
               <a:buChar char="l"/>
             </a:pPr>
             <a:r>
-              <a:rPr lang="zh-TW" altLang="en-US" dirty="0"/>
+              <a:rPr lang="zh-TW" altLang="en-US" dirty="0">
+                <a:latin typeface="標楷體" panose="03000509000000000000" pitchFamily="65" charset="-120"/>
+              </a:rPr>
               <a:t>在使用測地級接收儀時，</a:t>
             </a:r>
             <a:r>
-              <a:rPr lang="en-US" altLang="zh-TW" b="1" dirty="0"/>
+              <a:rPr lang="en-US" altLang="zh-TW" b="1" dirty="0">
+                <a:latin typeface="標楷體" panose="03000509000000000000" pitchFamily="65" charset="-120"/>
+              </a:rPr>
               <a:t>3DMA GNSS RTK </a:t>
             </a:r>
             <a:r>
-              <a:rPr lang="zh-TW" altLang="en-US" b="1" dirty="0"/>
+              <a:rPr lang="zh-TW" altLang="en-US" b="1" dirty="0">
+                <a:latin typeface="標楷體" panose="03000509000000000000" pitchFamily="65" charset="-120"/>
+              </a:rPr>
               <a:t>能夠將都市峽谷環境中的平均定位誤差控制在 </a:t>
             </a:r>
             <a:r>
-              <a:rPr lang="en-US" altLang="zh-TW" b="1" dirty="0"/>
+              <a:rPr lang="en-US" altLang="zh-TW" b="1" dirty="0">
+                <a:latin typeface="標楷體" panose="03000509000000000000" pitchFamily="65" charset="-120"/>
+              </a:rPr>
               <a:t>10 </a:t>
             </a:r>
             <a:r>
-              <a:rPr lang="zh-TW" altLang="en-US" b="1" dirty="0"/>
+              <a:rPr lang="zh-TW" altLang="en-US" b="1" dirty="0">
+                <a:latin typeface="標楷體" panose="03000509000000000000" pitchFamily="65" charset="-120"/>
+              </a:rPr>
               <a:t>公分以內</a:t>
             </a:r>
             <a:r>
-              <a:rPr lang="zh-TW" altLang="en-US" dirty="0"/>
-              <a:t>，表現幾乎等同於擁有完美已知位置的理論最佳解（</a:t>
-            </a:r>
-            <a:r>
-              <a:rPr lang="en-US" altLang="zh-TW" dirty="0"/>
-              <a:t>3DMA BIE@GT</a:t>
-            </a:r>
-            <a:r>
-              <a:rPr lang="zh-TW" altLang="en-US" dirty="0"/>
-              <a:t>）</a:t>
-            </a:r>
-            <a:endParaRPr lang="en-US" altLang="zh-TW" dirty="0"/>
+              <a:rPr lang="zh-TW" altLang="en-US" dirty="0">
+                <a:latin typeface="標楷體" panose="03000509000000000000" pitchFamily="65" charset="-120"/>
+              </a:rPr>
+              <a:t>，表現幾乎等同於擁有完美已知位置的理論最佳解</a:t>
+            </a:r>
+            <a:r>
+              <a:rPr lang="en-US" altLang="zh-TW" dirty="0">
+                <a:latin typeface="標楷體" panose="03000509000000000000" pitchFamily="65" charset="-120"/>
+              </a:rPr>
+              <a:t>(3DMA BIE@GT)</a:t>
+            </a:r>
           </a:p>
           <a:p>
             <a:pPr marL="742950" lvl="1" indent="-285750">
@@ -16950,72 +18258,136 @@
               <a:buChar char="l"/>
             </a:pPr>
             <a:r>
-              <a:rPr lang="zh-TW" altLang="en-US" dirty="0"/>
-              <a:t>在建築分佈不均的場景中（實驗 </a:t>
-            </a:r>
-            <a:r>
-              <a:rPr lang="en-US" altLang="zh-TW" dirty="0"/>
+              <a:rPr lang="zh-TW" altLang="en-US" dirty="0">
+                <a:latin typeface="標楷體" panose="03000509000000000000" pitchFamily="65" charset="-120"/>
+              </a:rPr>
+              <a:t>在建築分佈不均的場景中</a:t>
+            </a:r>
+            <a:r>
+              <a:rPr lang="en-US" altLang="zh-TW" dirty="0">
+                <a:latin typeface="標楷體" panose="03000509000000000000" pitchFamily="65" charset="-120"/>
+              </a:rPr>
+              <a:t>(</a:t>
+            </a:r>
+            <a:r>
+              <a:rPr lang="zh-TW" altLang="en-US" dirty="0">
+                <a:latin typeface="標楷體" panose="03000509000000000000" pitchFamily="65" charset="-120"/>
+              </a:rPr>
+              <a:t>實驗 </a:t>
+            </a:r>
+            <a:r>
+              <a:rPr lang="en-US" altLang="zh-TW" dirty="0">
+                <a:latin typeface="標楷體" panose="03000509000000000000" pitchFamily="65" charset="-120"/>
+              </a:rPr>
               <a:t>4 </a:t>
             </a:r>
             <a:r>
-              <a:rPr lang="zh-TW" altLang="en-US" dirty="0"/>
+              <a:rPr lang="zh-TW" altLang="en-US" dirty="0">
+                <a:latin typeface="標楷體" panose="03000509000000000000" pitchFamily="65" charset="-120"/>
+              </a:rPr>
               <a:t>與實驗 </a:t>
             </a:r>
             <a:r>
-              <a:rPr lang="en-US" altLang="zh-TW" dirty="0"/>
-              <a:t>5</a:t>
-            </a:r>
-            <a:r>
-              <a:rPr lang="zh-TW" altLang="en-US" dirty="0"/>
-              <a:t>），傳統提高仰角遮罩（</a:t>
-            </a:r>
-            <a:r>
-              <a:rPr lang="en-US" altLang="zh-TW" dirty="0"/>
-              <a:t>BIE@EL35</a:t>
-            </a:r>
-            <a:r>
-              <a:rPr lang="zh-TW" altLang="en-US" dirty="0"/>
-              <a:t>）的方法改善有限，而 </a:t>
-            </a:r>
-            <a:r>
-              <a:rPr lang="en-US" altLang="zh-TW" dirty="0"/>
+              <a:rPr lang="en-US" altLang="zh-TW" dirty="0">
+                <a:latin typeface="標楷體" panose="03000509000000000000" pitchFamily="65" charset="-120"/>
+              </a:rPr>
+              <a:t>5)</a:t>
+            </a:r>
+            <a:r>
+              <a:rPr lang="zh-TW" altLang="en-US" dirty="0">
+                <a:latin typeface="標楷體" panose="03000509000000000000" pitchFamily="65" charset="-120"/>
+              </a:rPr>
+              <a:t>，傳統提高仰角遮罩</a:t>
+            </a:r>
+            <a:r>
+              <a:rPr lang="en-US" altLang="zh-TW" dirty="0">
+                <a:latin typeface="標楷體" panose="03000509000000000000" pitchFamily="65" charset="-120"/>
+              </a:rPr>
+              <a:t>(BIE@EL35)</a:t>
+            </a:r>
+            <a:r>
+              <a:rPr lang="zh-TW" altLang="en-US" dirty="0">
+                <a:latin typeface="標楷體" panose="03000509000000000000" pitchFamily="65" charset="-120"/>
+              </a:rPr>
+              <a:t>的方法改善有限，而 </a:t>
+            </a:r>
+            <a:r>
+              <a:rPr lang="en-US" altLang="zh-TW" dirty="0">
+                <a:latin typeface="標楷體" panose="03000509000000000000" pitchFamily="65" charset="-120"/>
+              </a:rPr>
               <a:t>3DMA </a:t>
             </a:r>
             <a:r>
-              <a:rPr lang="zh-TW" altLang="en-US" dirty="0"/>
-              <a:t>方法則將均方根（</a:t>
-            </a:r>
-            <a:r>
-              <a:rPr lang="en-US" altLang="zh-TW" dirty="0"/>
-              <a:t>RMS</a:t>
-            </a:r>
-            <a:r>
-              <a:rPr lang="zh-TW" altLang="en-US" dirty="0"/>
-              <a:t>）誤差大幅降低數十公分（如實驗 </a:t>
-            </a:r>
-            <a:r>
-              <a:rPr lang="en-US" altLang="zh-TW" dirty="0"/>
+              <a:rPr lang="zh-TW" altLang="en-US" dirty="0">
+                <a:latin typeface="標楷體" panose="03000509000000000000" pitchFamily="65" charset="-120"/>
+              </a:rPr>
+              <a:t>方法則將均方根</a:t>
+            </a:r>
+            <a:r>
+              <a:rPr lang="en-US" altLang="zh-TW" dirty="0">
+                <a:latin typeface="標楷體" panose="03000509000000000000" pitchFamily="65" charset="-120"/>
+              </a:rPr>
+              <a:t>(RMS)</a:t>
+            </a:r>
+            <a:r>
+              <a:rPr lang="zh-TW" altLang="en-US" dirty="0">
+                <a:latin typeface="標楷體" panose="03000509000000000000" pitchFamily="65" charset="-120"/>
+              </a:rPr>
+              <a:t>誤差大幅降低數十公分</a:t>
+            </a:r>
+            <a:r>
+              <a:rPr lang="en-US" altLang="zh-TW" dirty="0">
+                <a:latin typeface="標楷體" panose="03000509000000000000" pitchFamily="65" charset="-120"/>
+              </a:rPr>
+              <a:t>(</a:t>
+            </a:r>
+            <a:r>
+              <a:rPr lang="zh-TW" altLang="en-US" dirty="0">
+                <a:latin typeface="標楷體" panose="03000509000000000000" pitchFamily="65" charset="-120"/>
+              </a:rPr>
+              <a:t>如實驗 </a:t>
+            </a:r>
+            <a:r>
+              <a:rPr lang="en-US" altLang="zh-TW" dirty="0">
+                <a:latin typeface="標楷體" panose="03000509000000000000" pitchFamily="65" charset="-120"/>
+              </a:rPr>
               <a:t>5 </a:t>
             </a:r>
             <a:r>
-              <a:rPr lang="zh-TW" altLang="en-US" dirty="0"/>
+              <a:rPr lang="zh-TW" altLang="en-US" dirty="0">
+                <a:latin typeface="標楷體" panose="03000509000000000000" pitchFamily="65" charset="-120"/>
+              </a:rPr>
               <a:t>的誤差從約 </a:t>
             </a:r>
             <a:r>
-              <a:rPr lang="en-US" altLang="zh-TW" dirty="0"/>
+              <a:rPr lang="en-US" altLang="zh-TW" dirty="0">
+                <a:latin typeface="標楷體" panose="03000509000000000000" pitchFamily="65" charset="-120"/>
+              </a:rPr>
               <a:t>60 </a:t>
             </a:r>
             <a:r>
-              <a:rPr lang="zh-TW" altLang="en-US" dirty="0"/>
+              <a:rPr lang="zh-TW" altLang="en-US" dirty="0">
+                <a:latin typeface="標楷體" panose="03000509000000000000" pitchFamily="65" charset="-120"/>
+              </a:rPr>
               <a:t>公分降至 </a:t>
             </a:r>
             <a:r>
-              <a:rPr lang="en-US" altLang="zh-TW" dirty="0"/>
+              <a:rPr lang="en-US" altLang="zh-TW" dirty="0">
+                <a:latin typeface="標楷體" panose="03000509000000000000" pitchFamily="65" charset="-120"/>
+              </a:rPr>
               <a:t>2 </a:t>
             </a:r>
             <a:r>
-              <a:rPr lang="zh-TW" altLang="en-US" dirty="0"/>
-              <a:t>公分以內）</a:t>
+              <a:rPr lang="zh-TW" altLang="en-US" dirty="0">
+                <a:latin typeface="標楷體" panose="03000509000000000000" pitchFamily="65" charset="-120"/>
+              </a:rPr>
+              <a:t>公分以內</a:t>
+            </a:r>
+            <a:r>
+              <a:rPr lang="en-US" altLang="zh-TW" dirty="0">
+                <a:latin typeface="標楷體" panose="03000509000000000000" pitchFamily="65" charset="-120"/>
+              </a:rPr>
+              <a:t>)</a:t>
             </a:r>
             <a:endParaRPr lang="en-US" altLang="zh-TW" dirty="0">
               <a:latin typeface="Google Sans Text"/>
